--- a/endowment/output/FY26_Endowment_Returns_Top50.pptx
+++ b/endowment/output/FY26_Endowment_Returns_Top50.pptx
@@ -764,6 +764,711 @@
 </c:chartSpace>
 </file>
 
+<file path=ppt/charts/chart2.xml><?xml version="1.0" encoding="utf-8"?>
+<c:chartSpace xmlns:c="http://schemas.openxmlformats.org/drawingml/2006/chart" xmlns:a="http://schemas.openxmlformats.org/drawingml/2006/main" xmlns:r="http://schemas.openxmlformats.org/officeDocument/2006/relationships">
+  <c:date1904 val="0"/>
+  <c:chart>
+    <c:autoTitleDeleted val="0"/>
+    <c:plotArea>
+      <c:barChart>
+        <c:barDir val="col"/>
+        <c:grouping val="clustered"/>
+        <c:ser>
+          <c:idx val="0"/>
+          <c:order val="0"/>
+          <c:tx>
+            <c:strRef>
+              <c:f>Sheet1!$B$1</c:f>
+              <c:strCache>
+                <c:ptCount val="1"/>
+                <c:pt idx="0">
+                  <c:v>Total</c:v>
+                </c:pt>
+              </c:strCache>
+            </c:strRef>
+          </c:tx>
+          <c:dPt>
+            <c:idx val="0"/>
+            <c:spPr>
+              <a:solidFill>
+                <a:srgbClr val="D6D7D9"/>
+              </a:solidFill>
+              <a:ln w="6350">
+                <a:solidFill>
+                  <a:srgbClr val="8A8B8E"/>
+                </a:solidFill>
+              </a:ln>
+            </c:spPr>
+          </c:dPt>
+          <c:dPt>
+            <c:idx val="1"/>
+            <c:spPr>
+              <a:solidFill>
+                <a:srgbClr val="D6D7D9"/>
+              </a:solidFill>
+              <a:ln w="6350">
+                <a:solidFill>
+                  <a:srgbClr val="8A8B8E"/>
+                </a:solidFill>
+              </a:ln>
+            </c:spPr>
+          </c:dPt>
+          <c:dLbls>
+            <c:dLbl>
+              <c:idx val="0"/>
+              <c:tx>
+                <c:rich>
+                  <a:bodyPr/>
+                  <a:lstStyle/>
+                  <a:p>
+                    <a:r>
+                      <a:rPr sz="1400" b="1">
+                        <a:solidFill>
+                          <a:srgbClr val="1E2028"/>
+                        </a:solidFill>
+                        <a:latin typeface="Lato"/>
+                      </a:rPr>
+                      <a:t>12.5%</a:t>
+                    </a:r>
+                  </a:p>
+                </c:rich>
+              </c:tx>
+              <c:dLblPos val="outEnd"/>
+              <c:showLegendKey val="0"/>
+              <c:showVal val="1"/>
+              <c:showCatName val="0"/>
+              <c:showSerName val="0"/>
+              <c:showPercent val="0"/>
+              <c:showBubbleSize val="0"/>
+            </c:dLbl>
+            <c:dLbl>
+              <c:idx val="1"/>
+              <c:tx>
+                <c:rich>
+                  <a:bodyPr/>
+                  <a:lstStyle/>
+                  <a:p>
+                    <a:r>
+                      <a:rPr sz="1400" b="1">
+                        <a:solidFill>
+                          <a:srgbClr val="1E2028"/>
+                        </a:solidFill>
+                        <a:latin typeface="Lato"/>
+                      </a:rPr>
+                      <a:t>10.3%</a:t>
+                    </a:r>
+                  </a:p>
+                </c:rich>
+              </c:tx>
+              <c:dLblPos val="outEnd"/>
+              <c:showLegendKey val="0"/>
+              <c:showVal val="1"/>
+              <c:showCatName val="0"/>
+              <c:showSerName val="0"/>
+              <c:showPercent val="0"/>
+              <c:showBubbleSize val="0"/>
+            </c:dLbl>
+            <c:showLegendKey val="0"/>
+            <c:showVal val="0"/>
+            <c:showCatName val="0"/>
+            <c:showSerName val="0"/>
+            <c:showPercent val="0"/>
+            <c:showBubbleSize val="0"/>
+            <c:showLeaderLines val="1"/>
+          </c:dLbls>
+          <c:cat>
+            <c:strRef>
+              <c:f>Sheet1!$A$2:$A$3</c:f>
+              <c:strCache>
+                <c:ptCount val="2"/>
+                <c:pt idx="0">
+                  <c:v>UNC
+(#27)</c:v>
+                </c:pt>
+                <c:pt idx="1">
+                  <c:v>Stanford
+(#5)</c:v>
+                </c:pt>
+              </c:strCache>
+            </c:strRef>
+          </c:cat>
+          <c:val>
+            <c:numRef>
+              <c:f>Sheet1!$B$2:$B$3</c:f>
+              <c:numCache>
+                <c:formatCode>General</c:formatCode>
+                <c:ptCount val="2"/>
+                <c:pt idx="0">
+                  <c:v>12.5</c:v>
+                </c:pt>
+                <c:pt idx="1">
+                  <c:v>10.3</c:v>
+                </c:pt>
+              </c:numCache>
+            </c:numRef>
+          </c:val>
+        </c:ser>
+        <c:ser>
+          <c:idx val="1"/>
+          <c:order val="1"/>
+          <c:tx>
+            <c:strRef>
+              <c:f>Sheet1!$C$1</c:f>
+              <c:strCache>
+                <c:ptCount val="1"/>
+                <c:pt idx="0">
+                  <c:v>Base return</c:v>
+                </c:pt>
+              </c:strCache>
+            </c:strRef>
+          </c:tx>
+          <c:dPt>
+            <c:idx val="0"/>
+            <c:spPr>
+              <a:solidFill>
+                <a:srgbClr val="D6D7D9"/>
+              </a:solidFill>
+              <a:ln w="6350">
+                <a:solidFill>
+                  <a:srgbClr val="8A8B8E"/>
+                </a:solidFill>
+              </a:ln>
+            </c:spPr>
+          </c:dPt>
+          <c:dPt>
+            <c:idx val="1"/>
+            <c:spPr>
+              <a:solidFill>
+                <a:srgbClr val="D6D7D9"/>
+              </a:solidFill>
+              <a:ln w="6350">
+                <a:solidFill>
+                  <a:srgbClr val="8A8B8E"/>
+                </a:solidFill>
+              </a:ln>
+            </c:spPr>
+          </c:dPt>
+          <c:cat>
+            <c:strRef>
+              <c:f>Sheet1!$A$2:$A$3</c:f>
+              <c:strCache>
+                <c:ptCount val="2"/>
+                <c:pt idx="0">
+                  <c:v>UNC
+(#27)</c:v>
+                </c:pt>
+                <c:pt idx="1">
+                  <c:v>Stanford
+(#5)</c:v>
+                </c:pt>
+              </c:strCache>
+            </c:strRef>
+          </c:cat>
+          <c:val>
+            <c:numRef>
+              <c:f>Sheet1!$C$2:$C$3</c:f>
+              <c:numCache>
+                <c:formatCode>General</c:formatCode>
+                <c:ptCount val="2"/>
+                <c:pt idx="0">
+                  <c:v>12.5</c:v>
+                </c:pt>
+                <c:pt idx="1">
+                  <c:v>10.3</c:v>
+                </c:pt>
+              </c:numCache>
+            </c:numRef>
+          </c:val>
+        </c:ser>
+        <c:gapWidth val="45"/>
+        <c:overlap val="100"/>
+        <c:axId val="-2068027336"/>
+        <c:axId val="-2113994440"/>
+      </c:barChart>
+      <c:catAx>
+        <c:axId val="-2068027336"/>
+        <c:scaling>
+          <c:orientation val="minMax"/>
+        </c:scaling>
+        <c:delete val="0"/>
+        <c:axPos val="b"/>
+        <c:majorTickMark val="out"/>
+        <c:minorTickMark val="none"/>
+        <c:tickLblPos val="low"/>
+        <c:spPr>
+          <a:ln>
+            <a:solidFill>
+              <a:srgbClr val="000000"/>
+            </a:solidFill>
+          </a:ln>
+        </c:spPr>
+        <c:txPr>
+          <a:bodyPr/>
+          <a:lstStyle/>
+          <a:p>
+            <a:pPr>
+              <a:defRPr sz="1200"/>
+            </a:pPr>
+          </a:p>
+        </c:txPr>
+        <c:crossAx val="-2113994440"/>
+        <c:crosses val="autoZero"/>
+        <c:auto val="1"/>
+        <c:lblAlgn val="ctr"/>
+        <c:lblOffset val="100"/>
+        <c:tickLblSkip val="1"/>
+        <c:tickMarkSkip val="1"/>
+        <c:noMultiLvlLbl val="0"/>
+      </c:catAx>
+      <c:valAx>
+        <c:axId val="-2113994440"/>
+        <c:scaling>
+          <c:max val="20.0"/>
+          <c:min val="0.0"/>
+        </c:scaling>
+        <c:delete val="0"/>
+        <c:axPos val="l"/>
+        <c:majorGridlines>
+          <c:spPr>
+            <a:ln>
+              <a:solidFill>
+                <a:srgbClr val="E5E5EA"/>
+              </a:solidFill>
+            </a:ln>
+          </c:spPr>
+        </c:majorGridlines>
+        <c:numFmt formatCode="0&quot;%&quot;" sourceLinked="0"/>
+        <c:majorTickMark val="out"/>
+        <c:minorTickMark val="none"/>
+        <c:tickLblPos val="nextTo"/>
+        <c:spPr>
+          <a:ln>
+            <a:noFill/>
+          </a:ln>
+        </c:spPr>
+        <c:txPr>
+          <a:bodyPr/>
+          <a:lstStyle/>
+          <a:p>
+            <a:pPr>
+              <a:defRPr sz="1100"/>
+            </a:pPr>
+          </a:p>
+        </c:txPr>
+        <c:crossAx val="-2068027336"/>
+        <c:crosses val="autoZero"/>
+        <c:majorUnit val="5.0"/>
+      </c:valAx>
+    </c:plotArea>
+    <c:dispBlanksAs val="gap"/>
+  </c:chart>
+  <c:txPr>
+    <a:bodyPr/>
+    <a:lstStyle/>
+    <a:p>
+      <a:pPr>
+        <a:defRPr sz="1200">
+          <a:solidFill>
+            <a:srgbClr val="1E2028"/>
+          </a:solidFill>
+          <a:latin typeface="Lato"/>
+        </a:defRPr>
+      </a:pPr>
+      <a:endParaRPr lang="en-US"/>
+    </a:p>
+  </c:txPr>
+  <c:externalData r:id="rId1">
+    <c:autoUpdate val="0"/>
+  </c:externalData>
+</c:chartSpace>
+</file>
+
+<file path=ppt/charts/chart3.xml><?xml version="1.0" encoding="utf-8"?>
+<c:chartSpace xmlns:c="http://schemas.openxmlformats.org/drawingml/2006/chart" xmlns:a="http://schemas.openxmlformats.org/drawingml/2006/main" xmlns:r="http://schemas.openxmlformats.org/officeDocument/2006/relationships">
+  <c:date1904 val="0"/>
+  <c:chart>
+    <c:autoTitleDeleted val="0"/>
+    <c:plotArea>
+      <c:barChart>
+        <c:barDir val="col"/>
+        <c:grouping val="clustered"/>
+        <c:ser>
+          <c:idx val="0"/>
+          <c:order val="0"/>
+          <c:tx>
+            <c:strRef>
+              <c:f>Sheet1!$B$1</c:f>
+              <c:strCache>
+                <c:ptCount val="1"/>
+                <c:pt idx="0">
+                  <c:v>Total</c:v>
+                </c:pt>
+              </c:strCache>
+            </c:strRef>
+          </c:tx>
+          <c:dPt>
+            <c:idx val="0"/>
+            <c:spPr>
+              <a:solidFill>
+                <a:srgbClr val="D6D7D9"/>
+              </a:solidFill>
+              <a:ln w="6350">
+                <a:solidFill>
+                  <a:srgbClr val="8A8B8E"/>
+                </a:solidFill>
+              </a:ln>
+            </c:spPr>
+          </c:dPt>
+          <c:dPt>
+            <c:idx val="1"/>
+            <c:spPr>
+              <a:solidFill>
+                <a:srgbClr val="D6D7D9"/>
+              </a:solidFill>
+              <a:ln w="6350">
+                <a:solidFill>
+                  <a:srgbClr val="8A8B8E"/>
+                </a:solidFill>
+              </a:ln>
+            </c:spPr>
+          </c:dPt>
+          <c:dPt>
+            <c:idx val="2"/>
+            <c:spPr>
+              <a:solidFill>
+                <a:srgbClr val="D6D7D9"/>
+              </a:solidFill>
+              <a:ln w="6350">
+                <a:solidFill>
+                  <a:srgbClr val="8A8B8E"/>
+                </a:solidFill>
+              </a:ln>
+            </c:spPr>
+          </c:dPt>
+          <c:dLbls>
+            <c:dLbl>
+              <c:idx val="0"/>
+              <c:tx>
+                <c:rich>
+                  <a:bodyPr/>
+                  <a:lstStyle/>
+                  <a:p>
+                    <a:r>
+                      <a:rPr sz="1400" b="1">
+                        <a:solidFill>
+                          <a:srgbClr val="1E2028"/>
+                        </a:solidFill>
+                        <a:latin typeface="Lato"/>
+                      </a:rPr>
+                      <a:t>13.5%</a:t>
+                    </a:r>
+                  </a:p>
+                </c:rich>
+              </c:tx>
+              <c:dLblPos val="outEnd"/>
+              <c:showLegendKey val="0"/>
+              <c:showVal val="1"/>
+              <c:showCatName val="0"/>
+              <c:showSerName val="0"/>
+              <c:showPercent val="0"/>
+              <c:showBubbleSize val="0"/>
+            </c:dLbl>
+            <c:dLbl>
+              <c:idx val="1"/>
+              <c:tx>
+                <c:rich>
+                  <a:bodyPr/>
+                  <a:lstStyle/>
+                  <a:p>
+                    <a:r>
+                      <a:rPr sz="1400" b="1">
+                        <a:solidFill>
+                          <a:srgbClr val="1E2028"/>
+                        </a:solidFill>
+                        <a:latin typeface="Lato"/>
+                      </a:rPr>
+                      <a:t>12.5%</a:t>
+                    </a:r>
+                  </a:p>
+                </c:rich>
+              </c:tx>
+              <c:dLblPos val="outEnd"/>
+              <c:showLegendKey val="0"/>
+              <c:showVal val="1"/>
+              <c:showCatName val="0"/>
+              <c:showSerName val="0"/>
+              <c:showPercent val="0"/>
+              <c:showBubbleSize val="0"/>
+            </c:dLbl>
+            <c:dLbl>
+              <c:idx val="2"/>
+              <c:tx>
+                <c:rich>
+                  <a:bodyPr/>
+                  <a:lstStyle/>
+                  <a:p>
+                    <a:r>
+                      <a:rPr sz="1400" b="1">
+                        <a:solidFill>
+                          <a:srgbClr val="1E2028"/>
+                        </a:solidFill>
+                        <a:latin typeface="Lato"/>
+                      </a:rPr>
+                      <a:t>12.0%</a:t>
+                    </a:r>
+                  </a:p>
+                </c:rich>
+              </c:tx>
+              <c:dLblPos val="outEnd"/>
+              <c:showLegendKey val="0"/>
+              <c:showVal val="1"/>
+              <c:showCatName val="0"/>
+              <c:showSerName val="0"/>
+              <c:showPercent val="0"/>
+              <c:showBubbleSize val="0"/>
+            </c:dLbl>
+            <c:showLegendKey val="0"/>
+            <c:showVal val="0"/>
+            <c:showCatName val="0"/>
+            <c:showSerName val="0"/>
+            <c:showPercent val="0"/>
+            <c:showBubbleSize val="0"/>
+            <c:showLeaderLines val="1"/>
+          </c:dLbls>
+          <c:cat>
+            <c:strRef>
+              <c:f>Sheet1!$A$2:$A$4</c:f>
+              <c:strCache>
+                <c:ptCount val="3"/>
+                <c:pt idx="0">
+                  <c:v>UNC
+(#27)</c:v>
+                </c:pt>
+                <c:pt idx="1">
+                  <c:v>Stanford
+(#5)</c:v>
+                </c:pt>
+                <c:pt idx="2">
+                  <c:v>UVA
+(#26)</c:v>
+                </c:pt>
+              </c:strCache>
+            </c:strRef>
+          </c:cat>
+          <c:val>
+            <c:numRef>
+              <c:f>Sheet1!$B$2:$B$4</c:f>
+              <c:numCache>
+                <c:formatCode>General</c:formatCode>
+                <c:ptCount val="3"/>
+                <c:pt idx="0">
+                  <c:v>13.5</c:v>
+                </c:pt>
+                <c:pt idx="1">
+                  <c:v>12.5</c:v>
+                </c:pt>
+                <c:pt idx="2">
+                  <c:v>12</c:v>
+                </c:pt>
+              </c:numCache>
+            </c:numRef>
+          </c:val>
+        </c:ser>
+        <c:ser>
+          <c:idx val="1"/>
+          <c:order val="1"/>
+          <c:tx>
+            <c:strRef>
+              <c:f>Sheet1!$C$1</c:f>
+              <c:strCache>
+                <c:ptCount val="1"/>
+                <c:pt idx="0">
+                  <c:v>Base return</c:v>
+                </c:pt>
+              </c:strCache>
+            </c:strRef>
+          </c:tx>
+          <c:dPt>
+            <c:idx val="0"/>
+            <c:spPr>
+              <a:solidFill>
+                <a:srgbClr val="D6D7D9"/>
+              </a:solidFill>
+              <a:ln w="6350">
+                <a:solidFill>
+                  <a:srgbClr val="8A8B8E"/>
+                </a:solidFill>
+              </a:ln>
+            </c:spPr>
+          </c:dPt>
+          <c:dPt>
+            <c:idx val="1"/>
+            <c:spPr>
+              <a:solidFill>
+                <a:srgbClr val="D6D7D9"/>
+              </a:solidFill>
+              <a:ln w="6350">
+                <a:solidFill>
+                  <a:srgbClr val="8A8B8E"/>
+                </a:solidFill>
+              </a:ln>
+            </c:spPr>
+          </c:dPt>
+          <c:dPt>
+            <c:idx val="2"/>
+            <c:spPr>
+              <a:solidFill>
+                <a:srgbClr val="D6D7D9"/>
+              </a:solidFill>
+              <a:ln w="6350">
+                <a:solidFill>
+                  <a:srgbClr val="8A8B8E"/>
+                </a:solidFill>
+              </a:ln>
+            </c:spPr>
+          </c:dPt>
+          <c:cat>
+            <c:strRef>
+              <c:f>Sheet1!$A$2:$A$4</c:f>
+              <c:strCache>
+                <c:ptCount val="3"/>
+                <c:pt idx="0">
+                  <c:v>UNC
+(#27)</c:v>
+                </c:pt>
+                <c:pt idx="1">
+                  <c:v>Stanford
+(#5)</c:v>
+                </c:pt>
+                <c:pt idx="2">
+                  <c:v>UVA
+(#26)</c:v>
+                </c:pt>
+              </c:strCache>
+            </c:strRef>
+          </c:cat>
+          <c:val>
+            <c:numRef>
+              <c:f>Sheet1!$C$2:$C$4</c:f>
+              <c:numCache>
+                <c:formatCode>General</c:formatCode>
+                <c:ptCount val="3"/>
+                <c:pt idx="0">
+                  <c:v>13.5</c:v>
+                </c:pt>
+                <c:pt idx="1">
+                  <c:v>12.5</c:v>
+                </c:pt>
+                <c:pt idx="2">
+                  <c:v>12</c:v>
+                </c:pt>
+              </c:numCache>
+            </c:numRef>
+          </c:val>
+        </c:ser>
+        <c:gapWidth val="45"/>
+        <c:overlap val="100"/>
+        <c:axId val="-2068027336"/>
+        <c:axId val="-2113994440"/>
+      </c:barChart>
+      <c:catAx>
+        <c:axId val="-2068027336"/>
+        <c:scaling>
+          <c:orientation val="minMax"/>
+        </c:scaling>
+        <c:delete val="0"/>
+        <c:axPos val="b"/>
+        <c:majorTickMark val="out"/>
+        <c:minorTickMark val="none"/>
+        <c:tickLblPos val="low"/>
+        <c:spPr>
+          <a:ln>
+            <a:solidFill>
+              <a:srgbClr val="000000"/>
+            </a:solidFill>
+          </a:ln>
+        </c:spPr>
+        <c:txPr>
+          <a:bodyPr/>
+          <a:lstStyle/>
+          <a:p>
+            <a:pPr>
+              <a:defRPr sz="1200"/>
+            </a:pPr>
+          </a:p>
+        </c:txPr>
+        <c:crossAx val="-2113994440"/>
+        <c:crosses val="autoZero"/>
+        <c:auto val="1"/>
+        <c:lblAlgn val="ctr"/>
+        <c:lblOffset val="100"/>
+        <c:tickLblSkip val="1"/>
+        <c:tickMarkSkip val="1"/>
+        <c:noMultiLvlLbl val="0"/>
+      </c:catAx>
+      <c:valAx>
+        <c:axId val="-2113994440"/>
+        <c:scaling>
+          <c:max val="20.0"/>
+          <c:min val="0.0"/>
+        </c:scaling>
+        <c:delete val="0"/>
+        <c:axPos val="l"/>
+        <c:majorGridlines>
+          <c:spPr>
+            <a:ln>
+              <a:solidFill>
+                <a:srgbClr val="E5E5EA"/>
+              </a:solidFill>
+            </a:ln>
+          </c:spPr>
+        </c:majorGridlines>
+        <c:numFmt formatCode="0&quot;%&quot;" sourceLinked="0"/>
+        <c:majorTickMark val="out"/>
+        <c:minorTickMark val="none"/>
+        <c:tickLblPos val="nextTo"/>
+        <c:spPr>
+          <a:ln>
+            <a:noFill/>
+          </a:ln>
+        </c:spPr>
+        <c:txPr>
+          <a:bodyPr/>
+          <a:lstStyle/>
+          <a:p>
+            <a:pPr>
+              <a:defRPr sz="1100"/>
+            </a:pPr>
+          </a:p>
+        </c:txPr>
+        <c:crossAx val="-2068027336"/>
+        <c:crosses val="autoZero"/>
+        <c:majorUnit val="5.0"/>
+      </c:valAx>
+    </c:plotArea>
+    <c:dispBlanksAs val="gap"/>
+  </c:chart>
+  <c:txPr>
+    <a:bodyPr/>
+    <a:lstStyle/>
+    <a:p>
+      <a:pPr>
+        <a:defRPr sz="1200">
+          <a:solidFill>
+            <a:srgbClr val="1E2028"/>
+          </a:solidFill>
+          <a:latin typeface="Lato"/>
+        </a:defRPr>
+      </a:pPr>
+      <a:endParaRPr lang="en-US"/>
+    </a:p>
+  </c:txPr>
+  <c:externalData r:id="rId1">
+    <c:autoUpdate val="0"/>
+  </c:externalData>
+</c:chartSpace>
+</file>
+
 <file path=ppt/slideLayouts/slideLayout1.xml><?xml version="1.0" encoding="utf-8"?>
 <p:sldLayout xmlns:a="http://schemas.openxmlformats.org/drawingml/2006/main" xmlns:r="http://schemas.openxmlformats.org/officeDocument/2006/relationships" xmlns:p="http://schemas.openxmlformats.org/presentationml/2006/main" type="title" preserve="1">
   <p:cSld name="Title Slide">
@@ -4277,8 +4982,8 @@
         </p:nvSpPr>
         <p:spPr>
           <a:xfrm>
-            <a:off x="365760" y="1005840"/>
-            <a:ext cx="11457432" cy="914400"/>
+            <a:off x="365760" y="932688"/>
+            <a:ext cx="11457432" cy="457200"/>
           </a:xfrm>
           <a:prstGeom prst="rect">
             <a:avLst/>
@@ -4293,20 +4998,200 @@
           <a:p>
             <a:pPr algn="l"/>
             <a:r>
-              <a:rPr sz="1500" b="0" i="0">
+              <a:rPr sz="1300" b="0" i="0">
                 <a:solidFill>
                   <a:srgbClr val="6E6F73"/>
                 </a:solidFill>
                 <a:latin typeface="Lato"/>
               </a:rPr>
-              <a:t>As of 2026-09-28, no institution in the 2027 Best National Universities (released Sept 22, 2026) top 50 has publicly reported this metric for FY26 yet. This slide will populate automatically as schools release FY26 investment results.</a:t>
-            </a:r>
-          </a:p>
-        </p:txBody>
-      </p:sp>
-      <p:sp>
-        <p:nvSpPr>
-          <p:cNvPr id="5" name="TextBox 4"/>
+              <a:t>As officially reported (updated 2026-09-28) — 2 of 51 institutions had released this metric.</a:t>
+            </a:r>
+          </a:p>
+        </p:txBody>
+      </p:sp>
+      <p:graphicFrame>
+        <p:nvGraphicFramePr>
+          <p:cNvPr id="5" name="Chart 4"/>
+          <p:cNvGraphicFramePr>
+            <a:graphicFrameLocks noGrp="1"/>
+          </p:cNvGraphicFramePr>
+          <p:nvPr/>
+        </p:nvGraphicFramePr>
+        <p:xfrm>
+          <a:off x="365760" y="1463040"/>
+          <a:ext cx="11457432" cy="4572000"/>
+        </p:xfrm>
+        <a:graphic>
+          <a:graphicData uri="http://schemas.openxmlformats.org/drawingml/2006/chart">
+            <c:chart xmlns:c="http://schemas.openxmlformats.org/drawingml/2006/chart" r:id="rId2"/>
+          </a:graphicData>
+        </a:graphic>
+      </p:graphicFrame>
+      <p:sp>
+        <p:nvSpPr>
+          <p:cNvPr id="6" name="Rectangle 5"/>
+          <p:cNvSpPr/>
+          <p:nvPr/>
+        </p:nvSpPr>
+        <p:spPr>
+          <a:xfrm>
+            <a:off x="365760" y="6089904"/>
+            <a:ext cx="182880" cy="182880"/>
+          </a:xfrm>
+          <a:prstGeom prst="rect">
+            <a:avLst/>
+          </a:prstGeom>
+          <a:solidFill>
+            <a:srgbClr val="D6D7D9"/>
+          </a:solidFill>
+          <a:ln w="6350">
+            <a:solidFill>
+              <a:srgbClr val="000000"/>
+            </a:solidFill>
+          </a:ln>
+          <a:effectLst/>
+        </p:spPr>
+        <p:style>
+          <a:lnRef idx="1">
+            <a:schemeClr val="accent1"/>
+          </a:lnRef>
+          <a:fillRef idx="3">
+            <a:schemeClr val="accent1"/>
+          </a:fillRef>
+          <a:effectRef idx="2">
+            <a:schemeClr val="accent1"/>
+          </a:effectRef>
+          <a:fontRef idx="minor">
+            <a:schemeClr val="lt1"/>
+          </a:fontRef>
+        </p:style>
+        <p:txBody>
+          <a:bodyPr rtlCol="0" anchor="ctr"/>
+          <a:lstStyle/>
+          <a:p>
+            <a:pPr algn="ctr"/>
+          </a:p>
+        </p:txBody>
+      </p:sp>
+      <p:sp>
+        <p:nvSpPr>
+          <p:cNvPr id="7" name="TextBox 6"/>
+          <p:cNvSpPr txBox="1"/>
+          <p:nvPr/>
+        </p:nvSpPr>
+        <p:spPr>
+          <a:xfrm>
+            <a:off x="621792" y="6071616"/>
+            <a:ext cx="1280160" cy="228600"/>
+          </a:xfrm>
+          <a:prstGeom prst="rect">
+            <a:avLst/>
+          </a:prstGeom>
+          <a:noFill/>
+        </p:spPr>
+        <p:txBody>
+          <a:bodyPr wrap="square" lIns="0" rIns="0" tIns="0" bIns="0">
+            <a:spAutoFit/>
+          </a:bodyPr>
+          <a:lstStyle/>
+          <a:p>
+            <a:pPr algn="l"/>
+            <a:r>
+              <a:rPr sz="1100" b="0" i="0">
+                <a:solidFill>
+                  <a:srgbClr val="1E2028"/>
+                </a:solidFill>
+                <a:latin typeface="Lato"/>
+              </a:rPr>
+              <a:t>Base return</a:t>
+            </a:r>
+          </a:p>
+        </p:txBody>
+      </p:sp>
+      <p:sp>
+        <p:nvSpPr>
+          <p:cNvPr id="8" name="Rectangle 7"/>
+          <p:cNvSpPr/>
+          <p:nvPr/>
+        </p:nvSpPr>
+        <p:spPr>
+          <a:xfrm>
+            <a:off x="1828800" y="6089904"/>
+            <a:ext cx="182880" cy="182880"/>
+          </a:xfrm>
+          <a:prstGeom prst="rect">
+            <a:avLst/>
+          </a:prstGeom>
+          <a:solidFill>
+            <a:srgbClr val="C8102E"/>
+          </a:solidFill>
+          <a:ln w="6350">
+            <a:solidFill>
+              <a:srgbClr val="000000"/>
+            </a:solidFill>
+          </a:ln>
+          <a:effectLst/>
+        </p:spPr>
+        <p:style>
+          <a:lnRef idx="1">
+            <a:schemeClr val="accent1"/>
+          </a:lnRef>
+          <a:fillRef idx="3">
+            <a:schemeClr val="accent1"/>
+          </a:fillRef>
+          <a:effectRef idx="2">
+            <a:schemeClr val="accent1"/>
+          </a:effectRef>
+          <a:fontRef idx="minor">
+            <a:schemeClr val="lt1"/>
+          </a:fontRef>
+        </p:style>
+        <p:txBody>
+          <a:bodyPr rtlCol="0" anchor="ctr"/>
+          <a:lstStyle/>
+          <a:p>
+            <a:pPr algn="ctr"/>
+          </a:p>
+        </p:txBody>
+      </p:sp>
+      <p:sp>
+        <p:nvSpPr>
+          <p:cNvPr id="9" name="TextBox 8"/>
+          <p:cNvSpPr txBox="1"/>
+          <p:nvPr/>
+        </p:nvSpPr>
+        <p:spPr>
+          <a:xfrm>
+            <a:off x="2084832" y="6071616"/>
+            <a:ext cx="1463040" cy="228600"/>
+          </a:xfrm>
+          <a:prstGeom prst="rect">
+            <a:avLst/>
+          </a:prstGeom>
+          <a:noFill/>
+        </p:spPr>
+        <p:txBody>
+          <a:bodyPr wrap="square" lIns="0" rIns="0" tIns="0" bIns="0">
+            <a:spAutoFit/>
+          </a:bodyPr>
+          <a:lstStyle/>
+          <a:p>
+            <a:pPr algn="l"/>
+            <a:r>
+              <a:rPr sz="1100" b="0" i="0">
+                <a:solidFill>
+                  <a:srgbClr val="1E2028"/>
+                </a:solidFill>
+                <a:latin typeface="Lato"/>
+              </a:rPr>
+              <a:t>Northeastern</a:t>
+            </a:r>
+          </a:p>
+        </p:txBody>
+      </p:sp>
+      <p:sp>
+        <p:nvSpPr>
+          <p:cNvPr id="10" name="TextBox 9"/>
           <p:cNvSpPr txBox="1"/>
           <p:nvPr/>
         </p:nvSpPr>
@@ -4334,14 +5219,14 @@
                 </a:solidFill>
                 <a:latin typeface="Lato"/>
               </a:rPr>
-              <a:t>Source: institution financial reports, board/trustee disclosures, and financial press coverage.</a:t>
-            </a:r>
-          </a:p>
-        </p:txBody>
-      </p:sp>
-      <p:sp>
-        <p:nvSpPr>
-          <p:cNvPr id="6" name="TextBox 5"/>
+              <a:t>Source: institution financial reports, board/trustee disclosures, and financial press coverage. US News rank in parentheses (2027 Best National Universities (released Sept 22, 2026); ties included). Remaining 49 of 51 institutions had not yet released this figure as of 2026-09-28.</a:t>
+            </a:r>
+          </a:p>
+        </p:txBody>
+      </p:sp>
+      <p:sp>
+        <p:nvSpPr>
+          <p:cNvPr id="11" name="TextBox 10"/>
           <p:cNvSpPr txBox="1"/>
           <p:nvPr/>
         </p:nvSpPr>
@@ -4470,8 +5355,8 @@
         </p:nvSpPr>
         <p:spPr>
           <a:xfrm>
-            <a:off x="365760" y="1005840"/>
-            <a:ext cx="11457432" cy="914400"/>
+            <a:off x="365760" y="932688"/>
+            <a:ext cx="11457432" cy="457200"/>
           </a:xfrm>
           <a:prstGeom prst="rect">
             <a:avLst/>
@@ -4486,20 +5371,200 @@
           <a:p>
             <a:pPr algn="l"/>
             <a:r>
-              <a:rPr sz="1500" b="0" i="0">
+              <a:rPr sz="1300" b="0" i="0">
                 <a:solidFill>
                   <a:srgbClr val="6E6F73"/>
                 </a:solidFill>
                 <a:latin typeface="Lato"/>
               </a:rPr>
-              <a:t>As of 2026-09-28, no institution in the 2027 Best National Universities (released Sept 22, 2026) top 50 has publicly reported this metric for FY26 yet. This slide will populate automatically as schools release FY26 investment results.</a:t>
-            </a:r>
-          </a:p>
-        </p:txBody>
-      </p:sp>
-      <p:sp>
-        <p:nvSpPr>
-          <p:cNvPr id="5" name="TextBox 4"/>
+              <a:t>As officially reported (updated 2026-09-28) — 3 of 51 institutions had released this metric.</a:t>
+            </a:r>
+          </a:p>
+        </p:txBody>
+      </p:sp>
+      <p:graphicFrame>
+        <p:nvGraphicFramePr>
+          <p:cNvPr id="5" name="Chart 4"/>
+          <p:cNvGraphicFramePr>
+            <a:graphicFrameLocks noGrp="1"/>
+          </p:cNvGraphicFramePr>
+          <p:nvPr/>
+        </p:nvGraphicFramePr>
+        <p:xfrm>
+          <a:off x="365760" y="1463040"/>
+          <a:ext cx="11457432" cy="4572000"/>
+        </p:xfrm>
+        <a:graphic>
+          <a:graphicData uri="http://schemas.openxmlformats.org/drawingml/2006/chart">
+            <c:chart xmlns:c="http://schemas.openxmlformats.org/drawingml/2006/chart" r:id="rId2"/>
+          </a:graphicData>
+        </a:graphic>
+      </p:graphicFrame>
+      <p:sp>
+        <p:nvSpPr>
+          <p:cNvPr id="6" name="Rectangle 5"/>
+          <p:cNvSpPr/>
+          <p:nvPr/>
+        </p:nvSpPr>
+        <p:spPr>
+          <a:xfrm>
+            <a:off x="365760" y="6089904"/>
+            <a:ext cx="182880" cy="182880"/>
+          </a:xfrm>
+          <a:prstGeom prst="rect">
+            <a:avLst/>
+          </a:prstGeom>
+          <a:solidFill>
+            <a:srgbClr val="D6D7D9"/>
+          </a:solidFill>
+          <a:ln w="6350">
+            <a:solidFill>
+              <a:srgbClr val="000000"/>
+            </a:solidFill>
+          </a:ln>
+          <a:effectLst/>
+        </p:spPr>
+        <p:style>
+          <a:lnRef idx="1">
+            <a:schemeClr val="accent1"/>
+          </a:lnRef>
+          <a:fillRef idx="3">
+            <a:schemeClr val="accent1"/>
+          </a:fillRef>
+          <a:effectRef idx="2">
+            <a:schemeClr val="accent1"/>
+          </a:effectRef>
+          <a:fontRef idx="minor">
+            <a:schemeClr val="lt1"/>
+          </a:fontRef>
+        </p:style>
+        <p:txBody>
+          <a:bodyPr rtlCol="0" anchor="ctr"/>
+          <a:lstStyle/>
+          <a:p>
+            <a:pPr algn="ctr"/>
+          </a:p>
+        </p:txBody>
+      </p:sp>
+      <p:sp>
+        <p:nvSpPr>
+          <p:cNvPr id="7" name="TextBox 6"/>
+          <p:cNvSpPr txBox="1"/>
+          <p:nvPr/>
+        </p:nvSpPr>
+        <p:spPr>
+          <a:xfrm>
+            <a:off x="621792" y="6071616"/>
+            <a:ext cx="1280160" cy="228600"/>
+          </a:xfrm>
+          <a:prstGeom prst="rect">
+            <a:avLst/>
+          </a:prstGeom>
+          <a:noFill/>
+        </p:spPr>
+        <p:txBody>
+          <a:bodyPr wrap="square" lIns="0" rIns="0" tIns="0" bIns="0">
+            <a:spAutoFit/>
+          </a:bodyPr>
+          <a:lstStyle/>
+          <a:p>
+            <a:pPr algn="l"/>
+            <a:r>
+              <a:rPr sz="1100" b="0" i="0">
+                <a:solidFill>
+                  <a:srgbClr val="1E2028"/>
+                </a:solidFill>
+                <a:latin typeface="Lato"/>
+              </a:rPr>
+              <a:t>Base return</a:t>
+            </a:r>
+          </a:p>
+        </p:txBody>
+      </p:sp>
+      <p:sp>
+        <p:nvSpPr>
+          <p:cNvPr id="8" name="Rectangle 7"/>
+          <p:cNvSpPr/>
+          <p:nvPr/>
+        </p:nvSpPr>
+        <p:spPr>
+          <a:xfrm>
+            <a:off x="1828800" y="6089904"/>
+            <a:ext cx="182880" cy="182880"/>
+          </a:xfrm>
+          <a:prstGeom prst="rect">
+            <a:avLst/>
+          </a:prstGeom>
+          <a:solidFill>
+            <a:srgbClr val="C8102E"/>
+          </a:solidFill>
+          <a:ln w="6350">
+            <a:solidFill>
+              <a:srgbClr val="000000"/>
+            </a:solidFill>
+          </a:ln>
+          <a:effectLst/>
+        </p:spPr>
+        <p:style>
+          <a:lnRef idx="1">
+            <a:schemeClr val="accent1"/>
+          </a:lnRef>
+          <a:fillRef idx="3">
+            <a:schemeClr val="accent1"/>
+          </a:fillRef>
+          <a:effectRef idx="2">
+            <a:schemeClr val="accent1"/>
+          </a:effectRef>
+          <a:fontRef idx="minor">
+            <a:schemeClr val="lt1"/>
+          </a:fontRef>
+        </p:style>
+        <p:txBody>
+          <a:bodyPr rtlCol="0" anchor="ctr"/>
+          <a:lstStyle/>
+          <a:p>
+            <a:pPr algn="ctr"/>
+          </a:p>
+        </p:txBody>
+      </p:sp>
+      <p:sp>
+        <p:nvSpPr>
+          <p:cNvPr id="9" name="TextBox 8"/>
+          <p:cNvSpPr txBox="1"/>
+          <p:nvPr/>
+        </p:nvSpPr>
+        <p:spPr>
+          <a:xfrm>
+            <a:off x="2084832" y="6071616"/>
+            <a:ext cx="1463040" cy="228600"/>
+          </a:xfrm>
+          <a:prstGeom prst="rect">
+            <a:avLst/>
+          </a:prstGeom>
+          <a:noFill/>
+        </p:spPr>
+        <p:txBody>
+          <a:bodyPr wrap="square" lIns="0" rIns="0" tIns="0" bIns="0">
+            <a:spAutoFit/>
+          </a:bodyPr>
+          <a:lstStyle/>
+          <a:p>
+            <a:pPr algn="l"/>
+            <a:r>
+              <a:rPr sz="1100" b="0" i="0">
+                <a:solidFill>
+                  <a:srgbClr val="1E2028"/>
+                </a:solidFill>
+                <a:latin typeface="Lato"/>
+              </a:rPr>
+              <a:t>Northeastern</a:t>
+            </a:r>
+          </a:p>
+        </p:txBody>
+      </p:sp>
+      <p:sp>
+        <p:nvSpPr>
+          <p:cNvPr id="10" name="TextBox 9"/>
           <p:cNvSpPr txBox="1"/>
           <p:nvPr/>
         </p:nvSpPr>
@@ -4527,14 +5592,14 @@
                 </a:solidFill>
                 <a:latin typeface="Lato"/>
               </a:rPr>
-              <a:t>Source: institution financial reports, board/trustee disclosures, and financial press coverage.</a:t>
-            </a:r>
-          </a:p>
-        </p:txBody>
-      </p:sp>
-      <p:sp>
-        <p:nvSpPr>
-          <p:cNvPr id="6" name="TextBox 5"/>
+              <a:t>Source: institution financial reports, board/trustee disclosures, and financial press coverage. US News rank in parentheses (2027 Best National Universities (released Sept 22, 2026); ties included). Remaining 48 of 51 institutions had not yet released this figure as of 2026-09-28.</a:t>
+            </a:r>
+          </a:p>
+        </p:txBody>
+      </p:sp>
+      <p:sp>
+        <p:nvSpPr>
+          <p:cNvPr id="11" name="TextBox 10"/>
           <p:cNvSpPr txBox="1"/>
           <p:nvPr/>
         </p:nvSpPr>

--- a/endowment/output/FY26_Endowment_Returns_Top50.pptx
+++ b/endowment/output/FY26_Endowment_Returns_Top50.pptx
@@ -204,6 +204,19 @@
             <c:spPr>
               <a:solidFill>
                 <a:srgbClr val="C8102E"/>
+              </a:solidFill>
+              <a:ln w="6350">
+                <a:solidFill>
+                  <a:srgbClr val="8A8B8E"/>
+                </a:solidFill>
+              </a:ln>
+            </c:spPr>
+          </c:dPt>
+          <c:dPt>
+            <c:idx val="6"/>
+            <c:spPr>
+              <a:solidFill>
+                <a:srgbClr val="D6D7D9"/>
               </a:solidFill>
               <a:ln w="6350">
                 <a:solidFill>
@@ -441,6 +454,44 @@
               <c:showPercent val="0"/>
               <c:showBubbleSize val="0"/>
             </c:dLbl>
+            <c:dLbl>
+              <c:idx val="6"/>
+              <c:tx>
+                <c:rich>
+                  <a:bodyPr/>
+                  <a:lstStyle/>
+                  <a:p>
+                    <a:r>
+                      <a:rPr sz="1400" b="1">
+                        <a:solidFill>
+                          <a:srgbClr val="1E2028"/>
+                        </a:solidFill>
+                        <a:latin typeface="Lato"/>
+                      </a:rPr>
+                      <a:t>10.3%</a:t>
+                    </a:r>
+                  </a:p>
+                  <a:p>
+                    <a:r>
+                      <a:rPr sz="1100">
+                        <a:solidFill>
+                          <a:srgbClr val="6E6F73"/>
+                        </a:solidFill>
+                        <a:latin typeface="Lato"/>
+                      </a:rPr>
+                      <a:t>$29.2B</a:t>
+                    </a:r>
+                  </a:p>
+                </c:rich>
+              </c:tx>
+              <c:dLblPos val="outEnd"/>
+              <c:showLegendKey val="0"/>
+              <c:showVal val="1"/>
+              <c:showCatName val="0"/>
+              <c:showSerName val="0"/>
+              <c:showPercent val="0"/>
+              <c:showBubbleSize val="0"/>
+            </c:dLbl>
             <c:showLegendKey val="0"/>
             <c:showVal val="0"/>
             <c:showCatName val="0"/>
@@ -451,9 +502,9 @@
           </c:dLbls>
           <c:cat>
             <c:strRef>
-              <c:f>Sheet1!$A$2:$A$7</c:f>
+              <c:f>Sheet1!$A$2:$A$8</c:f>
               <c:strCache>
-                <c:ptCount val="6"/>
+                <c:ptCount val="7"/>
                 <c:pt idx="0">
                   <c:v>UNC
 (#27)</c:v>
@@ -478,15 +529,19 @@
                   <c:v>Northeastern
 (#42)</c:v>
                 </c:pt>
+                <c:pt idx="6">
+                  <c:v>MIT
+(#1)</c:v>
+                </c:pt>
               </c:strCache>
             </c:strRef>
           </c:cat>
           <c:val>
             <c:numRef>
-              <c:f>Sheet1!$B$2:$B$7</c:f>
+              <c:f>Sheet1!$B$2:$B$8</c:f>
               <c:numCache>
                 <c:formatCode>General</c:formatCode>
-                <c:ptCount val="6"/>
+                <c:ptCount val="7"/>
                 <c:pt idx="0">
                   <c:v>37.8</c:v>
                 </c:pt>
@@ -504,6 +559,9 @@
                 </c:pt>
                 <c:pt idx="5">
                   <c:v>16</c:v>
+                </c:pt>
+                <c:pt idx="6">
+                  <c:v>10.3</c:v>
                 </c:pt>
               </c:numCache>
             </c:numRef>
@@ -601,11 +659,24 @@
               </a:ln>
             </c:spPr>
           </c:dPt>
+          <c:dPt>
+            <c:idx val="6"/>
+            <c:spPr>
+              <a:solidFill>
+                <a:srgbClr val="D6D7D9"/>
+              </a:solidFill>
+              <a:ln w="6350">
+                <a:solidFill>
+                  <a:srgbClr val="8A8B8E"/>
+                </a:solidFill>
+              </a:ln>
+            </c:spPr>
+          </c:dPt>
           <c:cat>
             <c:strRef>
-              <c:f>Sheet1!$A$2:$A$7</c:f>
+              <c:f>Sheet1!$A$2:$A$8</c:f>
               <c:strCache>
-                <c:ptCount val="6"/>
+                <c:ptCount val="7"/>
                 <c:pt idx="0">
                   <c:v>UNC
 (#27)</c:v>
@@ -630,15 +701,19 @@
                   <c:v>Northeastern
 (#42)</c:v>
                 </c:pt>
+                <c:pt idx="6">
+                  <c:v>MIT
+(#1)</c:v>
+                </c:pt>
               </c:strCache>
             </c:strRef>
           </c:cat>
           <c:val>
             <c:numRef>
-              <c:f>Sheet1!$C$2:$C$7</c:f>
+              <c:f>Sheet1!$C$2:$C$8</c:f>
               <c:numCache>
                 <c:formatCode>General</c:formatCode>
-                <c:ptCount val="6"/>
+                <c:ptCount val="7"/>
                 <c:pt idx="0">
                   <c:v>18.9</c:v>
                 </c:pt>
@@ -656,6 +731,9 @@
                 </c:pt>
                 <c:pt idx="5">
                   <c:v>16</c:v>
+                </c:pt>
+                <c:pt idx="6">
+                  <c:v>10.3</c:v>
                 </c:pt>
               </c:numCache>
             </c:numRef>
@@ -1145,6 +1223,19 @@
               </a:ln>
             </c:spPr>
           </c:dPt>
+          <c:dPt>
+            <c:idx val="3"/>
+            <c:spPr>
+              <a:solidFill>
+                <a:srgbClr val="D6D7D9"/>
+              </a:solidFill>
+              <a:ln w="6350">
+                <a:solidFill>
+                  <a:srgbClr val="8A8B8E"/>
+                </a:solidFill>
+              </a:ln>
+            </c:spPr>
+          </c:dPt>
           <c:dLbls>
             <c:dLbl>
               <c:idx val="0"/>
@@ -1227,6 +1318,33 @@
               <c:showPercent val="0"/>
               <c:showBubbleSize val="0"/>
             </c:dLbl>
+            <c:dLbl>
+              <c:idx val="3"/>
+              <c:tx>
+                <c:rich>
+                  <a:bodyPr/>
+                  <a:lstStyle/>
+                  <a:p>
+                    <a:r>
+                      <a:rPr sz="1400" b="1">
+                        <a:solidFill>
+                          <a:srgbClr val="1E2028"/>
+                        </a:solidFill>
+                        <a:latin typeface="Lato"/>
+                      </a:rPr>
+                      <a:t>11.7%</a:t>
+                    </a:r>
+                  </a:p>
+                </c:rich>
+              </c:tx>
+              <c:dLblPos val="outEnd"/>
+              <c:showLegendKey val="0"/>
+              <c:showVal val="1"/>
+              <c:showCatName val="0"/>
+              <c:showSerName val="0"/>
+              <c:showPercent val="0"/>
+              <c:showBubbleSize val="0"/>
+            </c:dLbl>
             <c:showLegendKey val="0"/>
             <c:showVal val="0"/>
             <c:showCatName val="0"/>
@@ -1237,9 +1355,9 @@
           </c:dLbls>
           <c:cat>
             <c:strRef>
-              <c:f>Sheet1!$A$2:$A$4</c:f>
+              <c:f>Sheet1!$A$2:$A$5</c:f>
               <c:strCache>
-                <c:ptCount val="3"/>
+                <c:ptCount val="4"/>
                 <c:pt idx="0">
                   <c:v>UNC
 (#27)</c:v>
@@ -1252,15 +1370,19 @@
                   <c:v>UVA
 (#26)</c:v>
                 </c:pt>
+                <c:pt idx="3">
+                  <c:v>MIT
+(#1)</c:v>
+                </c:pt>
               </c:strCache>
             </c:strRef>
           </c:cat>
           <c:val>
             <c:numRef>
-              <c:f>Sheet1!$B$2:$B$4</c:f>
+              <c:f>Sheet1!$B$2:$B$5</c:f>
               <c:numCache>
                 <c:formatCode>General</c:formatCode>
-                <c:ptCount val="3"/>
+                <c:ptCount val="4"/>
                 <c:pt idx="0">
                   <c:v>13.5</c:v>
                 </c:pt>
@@ -1269,6 +1391,9 @@
                 </c:pt>
                 <c:pt idx="2">
                   <c:v>12</c:v>
+                </c:pt>
+                <c:pt idx="3">
+                  <c:v>11.7</c:v>
                 </c:pt>
               </c:numCache>
             </c:numRef>
@@ -1327,11 +1452,24 @@
               </a:ln>
             </c:spPr>
           </c:dPt>
+          <c:dPt>
+            <c:idx val="3"/>
+            <c:spPr>
+              <a:solidFill>
+                <a:srgbClr val="D6D7D9"/>
+              </a:solidFill>
+              <a:ln w="6350">
+                <a:solidFill>
+                  <a:srgbClr val="8A8B8E"/>
+                </a:solidFill>
+              </a:ln>
+            </c:spPr>
+          </c:dPt>
           <c:cat>
             <c:strRef>
-              <c:f>Sheet1!$A$2:$A$4</c:f>
+              <c:f>Sheet1!$A$2:$A$5</c:f>
               <c:strCache>
-                <c:ptCount val="3"/>
+                <c:ptCount val="4"/>
                 <c:pt idx="0">
                   <c:v>UNC
 (#27)</c:v>
@@ -1344,15 +1482,19 @@
                   <c:v>UVA
 (#26)</c:v>
                 </c:pt>
+                <c:pt idx="3">
+                  <c:v>MIT
+(#1)</c:v>
+                </c:pt>
               </c:strCache>
             </c:strRef>
           </c:cat>
           <c:val>
             <c:numRef>
-              <c:f>Sheet1!$C$2:$C$4</c:f>
+              <c:f>Sheet1!$C$2:$C$5</c:f>
               <c:numCache>
                 <c:formatCode>General</c:formatCode>
-                <c:ptCount val="3"/>
+                <c:ptCount val="4"/>
                 <c:pt idx="0">
                   <c:v>13.5</c:v>
                 </c:pt>
@@ -1361,6 +1503,9 @@
                 </c:pt>
                 <c:pt idx="2">
                   <c:v>12</c:v>
+                </c:pt>
+                <c:pt idx="3">
+                  <c:v>11.7</c:v>
                 </c:pt>
               </c:numCache>
             </c:numRef>
@@ -4550,7 +4695,7 @@
                 </a:solidFill>
                 <a:latin typeface="Lato"/>
               </a:rPr>
-              <a:t>As officially reported (updated 2026-09-28) — 6 of 51 institutions had released this figure. Gold portion of a bar is the estimated share of the return attributable to legacy SpaceX venture stakes crystallized by SpaceX's 2026 IPO.</a:t>
+              <a:t>As officially reported (updated 2026-10-02) — 7 of 51 institutions had released this figure. Gold portion of a bar is the estimated share of the return attributable to legacy SpaceX venture stakes crystallized by SpaceX's 2026 IPO.</a:t>
             </a:r>
           </a:p>
         </p:txBody>
@@ -4846,7 +4991,7 @@
                 </a:solidFill>
                 <a:latin typeface="Lato"/>
               </a:rPr>
-              <a:t>Source: institution financial reports, board/trustee disclosures, and financial press coverage. US News rank in parentheses (2027 Best National Universities (released Sept 22, 2026); ties included). Dollar figure under each return is the reported FY26 endowment value; NA = not yet published. Northeastern's return is a management estimate pending audited figures. SpaceX-attributable shares reflect each institution's own disclosure; not an audited breakdown. Remaining 45 of 51 institutions had not yet released this figure as of 2026-09-28.</a:t>
+              <a:t>Source: institution financial reports, board/trustee disclosures, and financial press coverage. US News rank in parentheses (2027 Best National Universities (released Sept 22, 2026); ties included). Dollar figure under each return is the reported FY26 endowment value; NA = not yet published. Northeastern's return is a management estimate pending audited figures. SpaceX-attributable shares reflect each institution's own disclosure; not an audited breakdown. Remaining 44 of 51 institutions had not yet released this figure as of 2026-10-02.</a:t>
             </a:r>
           </a:p>
         </p:txBody>
@@ -5004,7 +5149,7 @@
                 </a:solidFill>
                 <a:latin typeface="Lato"/>
               </a:rPr>
-              <a:t>As officially reported (updated 2026-09-28) — 2 of 51 institutions had released this metric.</a:t>
+              <a:t>As officially reported (updated 2026-10-02) — 2 of 51 institutions had released this metric.</a:t>
             </a:r>
           </a:p>
         </p:txBody>
@@ -5219,7 +5364,7 @@
                 </a:solidFill>
                 <a:latin typeface="Lato"/>
               </a:rPr>
-              <a:t>Source: institution financial reports, board/trustee disclosures, and financial press coverage. US News rank in parentheses (2027 Best National Universities (released Sept 22, 2026); ties included). Remaining 49 of 51 institutions had not yet released this figure as of 2026-09-28.</a:t>
+              <a:t>Source: institution financial reports, board/trustee disclosures, and financial press coverage. US News rank in parentheses (2027 Best National Universities (released Sept 22, 2026); ties included). Remaining 49 of 51 institutions had not yet released this figure as of 2026-10-02.</a:t>
             </a:r>
           </a:p>
         </p:txBody>
@@ -5377,7 +5522,7 @@
                 </a:solidFill>
                 <a:latin typeface="Lato"/>
               </a:rPr>
-              <a:t>As officially reported (updated 2026-09-28) — 3 of 51 institutions had released this metric.</a:t>
+              <a:t>As officially reported (updated 2026-10-02) — 4 of 51 institutions had released this metric.</a:t>
             </a:r>
           </a:p>
         </p:txBody>
@@ -5592,7 +5737,7 @@
                 </a:solidFill>
                 <a:latin typeface="Lato"/>
               </a:rPr>
-              <a:t>Source: institution financial reports, board/trustee disclosures, and financial press coverage. US News rank in parentheses (2027 Best National Universities (released Sept 22, 2026); ties included). Remaining 48 of 51 institutions had not yet released this figure as of 2026-09-28.</a:t>
+              <a:t>Source: institution financial reports, board/trustee disclosures, and financial press coverage. US News rank in parentheses (2027 Best National Universities (released Sept 22, 2026); ties included). Remaining 47 of 51 institutions had not yet released this figure as of 2026-10-02.</a:t>
             </a:r>
           </a:p>
         </p:txBody>

--- a/endowment/output/FY26_Endowment_Returns_Top50.pptx
+++ b/endowment/output/FY26_Endowment_Returns_Top50.pptx
@@ -203,7 +203,7 @@
             <c:idx val="5"/>
             <c:spPr>
               <a:solidFill>
-                <a:srgbClr val="C8102E"/>
+                <a:srgbClr val="D6D7D9"/>
               </a:solidFill>
               <a:ln w="6350">
                 <a:solidFill>
@@ -214,6 +214,32 @@
           </c:dPt>
           <c:dPt>
             <c:idx val="6"/>
+            <c:spPr>
+              <a:solidFill>
+                <a:srgbClr val="D6D7D9"/>
+              </a:solidFill>
+              <a:ln w="6350">
+                <a:solidFill>
+                  <a:srgbClr val="8A8B8E"/>
+                </a:solidFill>
+              </a:ln>
+            </c:spPr>
+          </c:dPt>
+          <c:dPt>
+            <c:idx val="7"/>
+            <c:spPr>
+              <a:solidFill>
+                <a:srgbClr val="C8102E"/>
+              </a:solidFill>
+              <a:ln w="6350">
+                <a:solidFill>
+                  <a:srgbClr val="8A8B8E"/>
+                </a:solidFill>
+              </a:ln>
+            </c:spPr>
+          </c:dPt>
+          <c:dPt>
+            <c:idx val="8"/>
             <c:spPr>
               <a:solidFill>
                 <a:srgbClr val="D6D7D9"/>
@@ -426,6 +452,82 @@
                     <a:r>
                       <a:rPr sz="1400" b="1">
                         <a:solidFill>
+                          <a:srgbClr val="1E2028"/>
+                        </a:solidFill>
+                        <a:latin typeface="Lato"/>
+                      </a:rPr>
+                      <a:t>19.6%</a:t>
+                    </a:r>
+                  </a:p>
+                  <a:p>
+                    <a:r>
+                      <a:rPr sz="1100">
+                        <a:solidFill>
+                          <a:srgbClr val="6E6F73"/>
+                        </a:solidFill>
+                        <a:latin typeface="Lato"/>
+                      </a:rPr>
+                      <a:t>$9.5B</a:t>
+                    </a:r>
+                  </a:p>
+                </c:rich>
+              </c:tx>
+              <c:dLblPos val="outEnd"/>
+              <c:showLegendKey val="0"/>
+              <c:showVal val="1"/>
+              <c:showCatName val="0"/>
+              <c:showSerName val="0"/>
+              <c:showPercent val="0"/>
+              <c:showBubbleSize val="0"/>
+            </c:dLbl>
+            <c:dLbl>
+              <c:idx val="6"/>
+              <c:tx>
+                <c:rich>
+                  <a:bodyPr/>
+                  <a:lstStyle/>
+                  <a:p>
+                    <a:r>
+                      <a:rPr sz="1400" b="1">
+                        <a:solidFill>
+                          <a:srgbClr val="1E2028"/>
+                        </a:solidFill>
+                        <a:latin typeface="Lato"/>
+                      </a:rPr>
+                      <a:t>16.0%</a:t>
+                    </a:r>
+                  </a:p>
+                  <a:p>
+                    <a:r>
+                      <a:rPr sz="1100">
+                        <a:solidFill>
+                          <a:srgbClr val="6E6F73"/>
+                        </a:solidFill>
+                        <a:latin typeface="Lato"/>
+                      </a:rPr>
+                      <a:t>$9.7B</a:t>
+                    </a:r>
+                  </a:p>
+                </c:rich>
+              </c:tx>
+              <c:dLblPos val="outEnd"/>
+              <c:showLegendKey val="0"/>
+              <c:showVal val="1"/>
+              <c:showCatName val="0"/>
+              <c:showSerName val="0"/>
+              <c:showPercent val="0"/>
+              <c:showBubbleSize val="0"/>
+            </c:dLbl>
+            <c:dLbl>
+              <c:idx val="7"/>
+              <c:tx>
+                <c:rich>
+                  <a:bodyPr/>
+                  <a:lstStyle/>
+                  <a:p>
+                    <a:r>
+                      <a:rPr sz="1400" b="1">
+                        <a:solidFill>
                           <a:srgbClr val="C8102E"/>
                         </a:solidFill>
                         <a:latin typeface="Lato"/>
@@ -455,7 +557,7 @@
               <c:showBubbleSize val="0"/>
             </c:dLbl>
             <c:dLbl>
-              <c:idx val="6"/>
+              <c:idx val="8"/>
               <c:tx>
                 <c:rich>
                   <a:bodyPr/>
@@ -502,9 +604,9 @@
           </c:dLbls>
           <c:cat>
             <c:strRef>
-              <c:f>Sheet1!$A$2:$A$8</c:f>
+              <c:f>Sheet1!$A$2:$A$10</c:f>
               <c:strCache>
-                <c:ptCount val="7"/>
+                <c:ptCount val="9"/>
                 <c:pt idx="0">
                   <c:v>UNC
 (#27)</c:v>
@@ -526,10 +628,18 @@
 (#26)</c:v>
                 </c:pt>
                 <c:pt idx="5">
+                  <c:v>Brown
+(#16)</c:v>
+                </c:pt>
+                <c:pt idx="6">
+                  <c:v>Ohio State
+(#44)</c:v>
+                </c:pt>
+                <c:pt idx="7">
                   <c:v>Northeastern
 (#42)</c:v>
                 </c:pt>
-                <c:pt idx="6">
+                <c:pt idx="8">
                   <c:v>MIT
 (#1)</c:v>
                 </c:pt>
@@ -538,10 +648,10 @@
           </c:cat>
           <c:val>
             <c:numRef>
-              <c:f>Sheet1!$B$2:$B$8</c:f>
+              <c:f>Sheet1!$B$2:$B$10</c:f>
               <c:numCache>
                 <c:formatCode>General</c:formatCode>
-                <c:ptCount val="7"/>
+                <c:ptCount val="9"/>
                 <c:pt idx="0">
                   <c:v>37.8</c:v>
                 </c:pt>
@@ -558,9 +668,15 @@
                   <c:v>27</c:v>
                 </c:pt>
                 <c:pt idx="5">
+                  <c:v>19.6</c:v>
+                </c:pt>
+                <c:pt idx="6">
+                  <c:v>16.03</c:v>
+                </c:pt>
+                <c:pt idx="7">
                   <c:v>16</c:v>
                 </c:pt>
-                <c:pt idx="6">
+                <c:pt idx="8">
                   <c:v>10.3</c:v>
                 </c:pt>
               </c:numCache>
@@ -650,7 +766,7 @@
             <c:idx val="5"/>
             <c:spPr>
               <a:solidFill>
-                <a:srgbClr val="C8102E"/>
+                <a:srgbClr val="D6D7D9"/>
               </a:solidFill>
               <a:ln w="6350">
                 <a:solidFill>
@@ -672,11 +788,37 @@
               </a:ln>
             </c:spPr>
           </c:dPt>
+          <c:dPt>
+            <c:idx val="7"/>
+            <c:spPr>
+              <a:solidFill>
+                <a:srgbClr val="C8102E"/>
+              </a:solidFill>
+              <a:ln w="6350">
+                <a:solidFill>
+                  <a:srgbClr val="8A8B8E"/>
+                </a:solidFill>
+              </a:ln>
+            </c:spPr>
+          </c:dPt>
+          <c:dPt>
+            <c:idx val="8"/>
+            <c:spPr>
+              <a:solidFill>
+                <a:srgbClr val="D6D7D9"/>
+              </a:solidFill>
+              <a:ln w="6350">
+                <a:solidFill>
+                  <a:srgbClr val="8A8B8E"/>
+                </a:solidFill>
+              </a:ln>
+            </c:spPr>
+          </c:dPt>
           <c:cat>
             <c:strRef>
-              <c:f>Sheet1!$A$2:$A$8</c:f>
+              <c:f>Sheet1!$A$2:$A$10</c:f>
               <c:strCache>
-                <c:ptCount val="7"/>
+                <c:ptCount val="9"/>
                 <c:pt idx="0">
                   <c:v>UNC
 (#27)</c:v>
@@ -698,10 +840,18 @@
 (#26)</c:v>
                 </c:pt>
                 <c:pt idx="5">
+                  <c:v>Brown
+(#16)</c:v>
+                </c:pt>
+                <c:pt idx="6">
+                  <c:v>Ohio State
+(#44)</c:v>
+                </c:pt>
+                <c:pt idx="7">
                   <c:v>Northeastern
 (#42)</c:v>
                 </c:pt>
-                <c:pt idx="6">
+                <c:pt idx="8">
                   <c:v>MIT
 (#1)</c:v>
                 </c:pt>
@@ -710,10 +860,10 @@
           </c:cat>
           <c:val>
             <c:numRef>
-              <c:f>Sheet1!$C$2:$C$8</c:f>
+              <c:f>Sheet1!$C$2:$C$10</c:f>
               <c:numCache>
                 <c:formatCode>General</c:formatCode>
-                <c:ptCount val="7"/>
+                <c:ptCount val="9"/>
                 <c:pt idx="0">
                   <c:v>18.9</c:v>
                 </c:pt>
@@ -730,9 +880,15 @@
                   <c:v>27</c:v>
                 </c:pt>
                 <c:pt idx="5">
+                  <c:v>19.6</c:v>
+                </c:pt>
+                <c:pt idx="6">
+                  <c:v>16.03</c:v>
+                </c:pt>
+                <c:pt idx="7">
                   <c:v>16</c:v>
                 </c:pt>
-                <c:pt idx="6">
+                <c:pt idx="8">
                   <c:v>10.3</c:v>
                 </c:pt>
               </c:numCache>
@@ -880,6 +1036,32 @@
           </c:dPt>
           <c:dPt>
             <c:idx val="1"/>
+            <c:spPr>
+              <a:solidFill>
+                <a:srgbClr val="D6D7D9"/>
+              </a:solidFill>
+              <a:ln w="6350">
+                <a:solidFill>
+                  <a:srgbClr val="8A8B8E"/>
+                </a:solidFill>
+              </a:ln>
+            </c:spPr>
+          </c:dPt>
+          <c:dPt>
+            <c:idx val="2"/>
+            <c:spPr>
+              <a:solidFill>
+                <a:srgbClr val="D6D7D9"/>
+              </a:solidFill>
+              <a:ln w="6350">
+                <a:solidFill>
+                  <a:srgbClr val="8A8B8E"/>
+                </a:solidFill>
+              </a:ln>
+            </c:spPr>
+          </c:dPt>
+          <c:dPt>
+            <c:idx val="3"/>
             <c:spPr>
               <a:solidFill>
                 <a:srgbClr val="D6D7D9"/>
@@ -946,6 +1128,60 @@
               <c:showPercent val="0"/>
               <c:showBubbleSize val="0"/>
             </c:dLbl>
+            <c:dLbl>
+              <c:idx val="2"/>
+              <c:tx>
+                <c:rich>
+                  <a:bodyPr/>
+                  <a:lstStyle/>
+                  <a:p>
+                    <a:r>
+                      <a:rPr sz="1400" b="1">
+                        <a:solidFill>
+                          <a:srgbClr val="1E2028"/>
+                        </a:solidFill>
+                        <a:latin typeface="Lato"/>
+                      </a:rPr>
+                      <a:t>9.2%</a:t>
+                    </a:r>
+                  </a:p>
+                </c:rich>
+              </c:tx>
+              <c:dLblPos val="outEnd"/>
+              <c:showLegendKey val="0"/>
+              <c:showVal val="1"/>
+              <c:showCatName val="0"/>
+              <c:showSerName val="0"/>
+              <c:showPercent val="0"/>
+              <c:showBubbleSize val="0"/>
+            </c:dLbl>
+            <c:dLbl>
+              <c:idx val="3"/>
+              <c:tx>
+                <c:rich>
+                  <a:bodyPr/>
+                  <a:lstStyle/>
+                  <a:p>
+                    <a:r>
+                      <a:rPr sz="1400" b="1">
+                        <a:solidFill>
+                          <a:srgbClr val="1E2028"/>
+                        </a:solidFill>
+                        <a:latin typeface="Lato"/>
+                      </a:rPr>
+                      <a:t>7.8%</a:t>
+                    </a:r>
+                  </a:p>
+                </c:rich>
+              </c:tx>
+              <c:dLblPos val="outEnd"/>
+              <c:showLegendKey val="0"/>
+              <c:showVal val="1"/>
+              <c:showCatName val="0"/>
+              <c:showSerName val="0"/>
+              <c:showPercent val="0"/>
+              <c:showBubbleSize val="0"/>
+            </c:dLbl>
             <c:showLegendKey val="0"/>
             <c:showVal val="0"/>
             <c:showCatName val="0"/>
@@ -956,9 +1192,9 @@
           </c:dLbls>
           <c:cat>
             <c:strRef>
-              <c:f>Sheet1!$A$2:$A$3</c:f>
+              <c:f>Sheet1!$A$2:$A$5</c:f>
               <c:strCache>
-                <c:ptCount val="2"/>
+                <c:ptCount val="4"/>
                 <c:pt idx="0">
                   <c:v>UNC
 (#27)</c:v>
@@ -966,21 +1202,35 @@
                 <c:pt idx="1">
                   <c:v>Stanford
 (#5)</c:v>
+                </c:pt>
+                <c:pt idx="2">
+                  <c:v>Ohio State
+(#44)</c:v>
+                </c:pt>
+                <c:pt idx="3">
+                  <c:v>Brown
+(#16)</c:v>
                 </c:pt>
               </c:strCache>
             </c:strRef>
           </c:cat>
           <c:val>
             <c:numRef>
-              <c:f>Sheet1!$B$2:$B$3</c:f>
+              <c:f>Sheet1!$B$2:$B$5</c:f>
               <c:numCache>
                 <c:formatCode>General</c:formatCode>
-                <c:ptCount val="2"/>
+                <c:ptCount val="4"/>
                 <c:pt idx="0">
                   <c:v>12.5</c:v>
                 </c:pt>
                 <c:pt idx="1">
                   <c:v>10.3</c:v>
+                </c:pt>
+                <c:pt idx="2">
+                  <c:v>9.17</c:v>
+                </c:pt>
+                <c:pt idx="3">
+                  <c:v>7.8</c:v>
                 </c:pt>
               </c:numCache>
             </c:numRef>
@@ -1026,11 +1276,37 @@
               </a:ln>
             </c:spPr>
           </c:dPt>
+          <c:dPt>
+            <c:idx val="2"/>
+            <c:spPr>
+              <a:solidFill>
+                <a:srgbClr val="D6D7D9"/>
+              </a:solidFill>
+              <a:ln w="6350">
+                <a:solidFill>
+                  <a:srgbClr val="8A8B8E"/>
+                </a:solidFill>
+              </a:ln>
+            </c:spPr>
+          </c:dPt>
+          <c:dPt>
+            <c:idx val="3"/>
+            <c:spPr>
+              <a:solidFill>
+                <a:srgbClr val="D6D7D9"/>
+              </a:solidFill>
+              <a:ln w="6350">
+                <a:solidFill>
+                  <a:srgbClr val="8A8B8E"/>
+                </a:solidFill>
+              </a:ln>
+            </c:spPr>
+          </c:dPt>
           <c:cat>
             <c:strRef>
-              <c:f>Sheet1!$A$2:$A$3</c:f>
+              <c:f>Sheet1!$A$2:$A$5</c:f>
               <c:strCache>
-                <c:ptCount val="2"/>
+                <c:ptCount val="4"/>
                 <c:pt idx="0">
                   <c:v>UNC
 (#27)</c:v>
@@ -1038,21 +1314,35 @@
                 <c:pt idx="1">
                   <c:v>Stanford
 (#5)</c:v>
+                </c:pt>
+                <c:pt idx="2">
+                  <c:v>Ohio State
+(#44)</c:v>
+                </c:pt>
+                <c:pt idx="3">
+                  <c:v>Brown
+(#16)</c:v>
                 </c:pt>
               </c:strCache>
             </c:strRef>
           </c:cat>
           <c:val>
             <c:numRef>
-              <c:f>Sheet1!$C$2:$C$3</c:f>
+              <c:f>Sheet1!$C$2:$C$5</c:f>
               <c:numCache>
                 <c:formatCode>General</c:formatCode>
-                <c:ptCount val="2"/>
+                <c:ptCount val="4"/>
                 <c:pt idx="0">
                   <c:v>12.5</c:v>
                 </c:pt>
                 <c:pt idx="1">
                   <c:v>10.3</c:v>
+                </c:pt>
+                <c:pt idx="2">
+                  <c:v>9.17</c:v>
+                </c:pt>
+                <c:pt idx="3">
+                  <c:v>7.8</c:v>
                 </c:pt>
               </c:numCache>
             </c:numRef>
@@ -1236,9 +1526,49 @@
               </a:ln>
             </c:spPr>
           </c:dPt>
+          <c:dPt>
+            <c:idx val="4"/>
+            <c:spPr>
+              <a:solidFill>
+                <a:srgbClr val="D6D7D9"/>
+              </a:solidFill>
+              <a:ln w="6350">
+                <a:solidFill>
+                  <a:srgbClr val="8A8B8E"/>
+                </a:solidFill>
+              </a:ln>
+            </c:spPr>
+          </c:dPt>
           <c:dLbls>
             <c:dLbl>
               <c:idx val="0"/>
+              <c:tx>
+                <c:rich>
+                  <a:bodyPr/>
+                  <a:lstStyle/>
+                  <a:p>
+                    <a:r>
+                      <a:rPr sz="1400" b="1">
+                        <a:solidFill>
+                          <a:srgbClr val="1E2028"/>
+                        </a:solidFill>
+                        <a:latin typeface="Lato"/>
+                      </a:rPr>
+                      <a:t>13.6%</a:t>
+                    </a:r>
+                  </a:p>
+                </c:rich>
+              </c:tx>
+              <c:dLblPos val="outEnd"/>
+              <c:showLegendKey val="0"/>
+              <c:showVal val="1"/>
+              <c:showCatName val="0"/>
+              <c:showSerName val="0"/>
+              <c:showPercent val="0"/>
+              <c:showBubbleSize val="0"/>
+            </c:dLbl>
+            <c:dLbl>
+              <c:idx val="1"/>
               <c:tx>
                 <c:rich>
                   <a:bodyPr/>
@@ -1265,7 +1595,7 @@
               <c:showBubbleSize val="0"/>
             </c:dLbl>
             <c:dLbl>
-              <c:idx val="1"/>
+              <c:idx val="2"/>
               <c:tx>
                 <c:rich>
                   <a:bodyPr/>
@@ -1292,7 +1622,7 @@
               <c:showBubbleSize val="0"/>
             </c:dLbl>
             <c:dLbl>
-              <c:idx val="2"/>
+              <c:idx val="3"/>
               <c:tx>
                 <c:rich>
                   <a:bodyPr/>
@@ -1319,7 +1649,7 @@
               <c:showBubbleSize val="0"/>
             </c:dLbl>
             <c:dLbl>
-              <c:idx val="3"/>
+              <c:idx val="4"/>
               <c:tx>
                 <c:rich>
                   <a:bodyPr/>
@@ -1355,22 +1685,26 @@
           </c:dLbls>
           <c:cat>
             <c:strRef>
-              <c:f>Sheet1!$A$2:$A$5</c:f>
+              <c:f>Sheet1!$A$2:$A$6</c:f>
               <c:strCache>
-                <c:ptCount val="4"/>
+                <c:ptCount val="5"/>
                 <c:pt idx="0">
+                  <c:v>Brown
+(#16)</c:v>
+                </c:pt>
+                <c:pt idx="1">
                   <c:v>UNC
 (#27)</c:v>
                 </c:pt>
-                <c:pt idx="1">
+                <c:pt idx="2">
                   <c:v>Stanford
 (#5)</c:v>
                 </c:pt>
-                <c:pt idx="2">
+                <c:pt idx="3">
                   <c:v>UVA
 (#26)</c:v>
                 </c:pt>
-                <c:pt idx="3">
+                <c:pt idx="4">
                   <c:v>MIT
 (#1)</c:v>
                 </c:pt>
@@ -1379,20 +1713,23 @@
           </c:cat>
           <c:val>
             <c:numRef>
-              <c:f>Sheet1!$B$2:$B$5</c:f>
+              <c:f>Sheet1!$B$2:$B$6</c:f>
               <c:numCache>
                 <c:formatCode>General</c:formatCode>
-                <c:ptCount val="4"/>
+                <c:ptCount val="5"/>
                 <c:pt idx="0">
+                  <c:v>13.6</c:v>
+                </c:pt>
+                <c:pt idx="1">
                   <c:v>13.5</c:v>
                 </c:pt>
-                <c:pt idx="1">
+                <c:pt idx="2">
                   <c:v>12.5</c:v>
                 </c:pt>
-                <c:pt idx="2">
+                <c:pt idx="3">
                   <c:v>12</c:v>
                 </c:pt>
-                <c:pt idx="3">
+                <c:pt idx="4">
                   <c:v>11.7</c:v>
                 </c:pt>
               </c:numCache>
@@ -1465,24 +1802,41 @@
               </a:ln>
             </c:spPr>
           </c:dPt>
+          <c:dPt>
+            <c:idx val="4"/>
+            <c:spPr>
+              <a:solidFill>
+                <a:srgbClr val="D6D7D9"/>
+              </a:solidFill>
+              <a:ln w="6350">
+                <a:solidFill>
+                  <a:srgbClr val="8A8B8E"/>
+                </a:solidFill>
+              </a:ln>
+            </c:spPr>
+          </c:dPt>
           <c:cat>
             <c:strRef>
-              <c:f>Sheet1!$A$2:$A$5</c:f>
+              <c:f>Sheet1!$A$2:$A$6</c:f>
               <c:strCache>
-                <c:ptCount val="4"/>
+                <c:ptCount val="5"/>
                 <c:pt idx="0">
+                  <c:v>Brown
+(#16)</c:v>
+                </c:pt>
+                <c:pt idx="1">
                   <c:v>UNC
 (#27)</c:v>
                 </c:pt>
-                <c:pt idx="1">
+                <c:pt idx="2">
                   <c:v>Stanford
 (#5)</c:v>
                 </c:pt>
-                <c:pt idx="2">
+                <c:pt idx="3">
                   <c:v>UVA
 (#26)</c:v>
                 </c:pt>
-                <c:pt idx="3">
+                <c:pt idx="4">
                   <c:v>MIT
 (#1)</c:v>
                 </c:pt>
@@ -1491,20 +1845,23 @@
           </c:cat>
           <c:val>
             <c:numRef>
-              <c:f>Sheet1!$C$2:$C$5</c:f>
+              <c:f>Sheet1!$C$2:$C$6</c:f>
               <c:numCache>
                 <c:formatCode>General</c:formatCode>
-                <c:ptCount val="4"/>
+                <c:ptCount val="5"/>
                 <c:pt idx="0">
+                  <c:v>13.6</c:v>
+                </c:pt>
+                <c:pt idx="1">
                   <c:v>13.5</c:v>
                 </c:pt>
-                <c:pt idx="1">
+                <c:pt idx="2">
                   <c:v>12.5</c:v>
                 </c:pt>
-                <c:pt idx="2">
+                <c:pt idx="3">
                   <c:v>12</c:v>
                 </c:pt>
-                <c:pt idx="3">
+                <c:pt idx="4">
                   <c:v>11.7</c:v>
                 </c:pt>
               </c:numCache>
@@ -4695,7 +5052,7 @@
                 </a:solidFill>
                 <a:latin typeface="Lato"/>
               </a:rPr>
-              <a:t>As officially reported (updated 2026-10-02) — 7 of 51 institutions had released this figure. Gold portion of a bar is the estimated share of the return attributable to legacy SpaceX venture stakes crystallized by SpaceX's 2026 IPO.</a:t>
+              <a:t>As officially reported (updated 2026-10-09) — 9 of 51 institutions had released this figure. Gold portion of a bar is the estimated share of the return attributable to legacy SpaceX venture stakes crystallized by SpaceX's 2026 IPO.</a:t>
             </a:r>
           </a:p>
         </p:txBody>
@@ -4991,7 +5348,7 @@
                 </a:solidFill>
                 <a:latin typeface="Lato"/>
               </a:rPr>
-              <a:t>Source: institution financial reports, board/trustee disclosures, and financial press coverage. US News rank in parentheses (2027 Best National Universities (released Sept 22, 2026); ties included). Dollar figure under each return is the reported FY26 endowment value; NA = not yet published. Northeastern's return is a management estimate pending audited figures. SpaceX-attributable shares reflect each institution's own disclosure; not an audited breakdown. Remaining 44 of 51 institutions had not yet released this figure as of 2026-10-02.</a:t>
+              <a:t>Source: institution financial reports, board/trustee disclosures, and financial press coverage. US News rank in parentheses (2027 Best National Universities (released Sept 22, 2026); ties included). Dollar figure under each return is the reported FY26 endowment value; NA = not yet published. Northeastern's return is a management estimate pending audited figures. SpaceX-attributable shares reflect each institution's own disclosure; not an audited breakdown. Remaining 42 of 51 institutions had not yet released this figure as of 2026-10-09.</a:t>
             </a:r>
           </a:p>
         </p:txBody>
@@ -5149,7 +5506,7 @@
                 </a:solidFill>
                 <a:latin typeface="Lato"/>
               </a:rPr>
-              <a:t>As officially reported (updated 2026-10-02) — 2 of 51 institutions had released this metric.</a:t>
+              <a:t>As officially reported (updated 2026-10-09) — 4 of 51 institutions had released this metric.</a:t>
             </a:r>
           </a:p>
         </p:txBody>
@@ -5364,7 +5721,7 @@
                 </a:solidFill>
                 <a:latin typeface="Lato"/>
               </a:rPr>
-              <a:t>Source: institution financial reports, board/trustee disclosures, and financial press coverage. US News rank in parentheses (2027 Best National Universities (released Sept 22, 2026); ties included). Remaining 49 of 51 institutions had not yet released this figure as of 2026-10-02.</a:t>
+              <a:t>Source: institution financial reports, board/trustee disclosures, and financial press coverage. US News rank in parentheses (2027 Best National Universities (released Sept 22, 2026); ties included). Remaining 47 of 51 institutions had not yet released this figure as of 2026-10-09.</a:t>
             </a:r>
           </a:p>
         </p:txBody>
@@ -5522,7 +5879,7 @@
                 </a:solidFill>
                 <a:latin typeface="Lato"/>
               </a:rPr>
-              <a:t>As officially reported (updated 2026-10-02) — 4 of 51 institutions had released this metric.</a:t>
+              <a:t>As officially reported (updated 2026-10-09) — 5 of 51 institutions had released this metric.</a:t>
             </a:r>
           </a:p>
         </p:txBody>
@@ -5737,7 +6094,7 @@
                 </a:solidFill>
                 <a:latin typeface="Lato"/>
               </a:rPr>
-              <a:t>Source: institution financial reports, board/trustee disclosures, and financial press coverage. US News rank in parentheses (2027 Best National Universities (released Sept 22, 2026); ties included). Remaining 47 of 51 institutions had not yet released this figure as of 2026-10-02.</a:t>
+              <a:t>Source: institution financial reports, board/trustee disclosures, and financial press coverage. US News rank in parentheses (2027 Best National Universities (released Sept 22, 2026); ties included). Remaining 46 of 51 institutions had not yet released this figure as of 2026-10-09.</a:t>
             </a:r>
           </a:p>
         </p:txBody>

--- a/endowment/output/FY26_Endowment_Returns_Top50.pptx
+++ b/endowment/output/FY26_Endowment_Returns_Top50.pptx
@@ -229,7 +229,7 @@
             <c:idx val="7"/>
             <c:spPr>
               <a:solidFill>
-                <a:srgbClr val="C8102E"/>
+                <a:srgbClr val="D6D7D9"/>
               </a:solidFill>
               <a:ln w="6350">
                 <a:solidFill>
@@ -240,6 +240,19 @@
           </c:dPt>
           <c:dPt>
             <c:idx val="8"/>
+            <c:spPr>
+              <a:solidFill>
+                <a:srgbClr val="C8102E"/>
+              </a:solidFill>
+              <a:ln w="6350">
+                <a:solidFill>
+                  <a:srgbClr val="8A8B8E"/>
+                </a:solidFill>
+              </a:ln>
+            </c:spPr>
+          </c:dPt>
+          <c:dPt>
+            <c:idx val="9"/>
             <c:spPr>
               <a:solidFill>
                 <a:srgbClr val="D6D7D9"/>
@@ -418,6 +431,44 @@
                         </a:solidFill>
                         <a:latin typeface="Lato"/>
                       </a:rPr>
+                      <a:t>27.1%</a:t>
+                    </a:r>
+                  </a:p>
+                  <a:p>
+                    <a:r>
+                      <a:rPr sz="1100">
+                        <a:solidFill>
+                          <a:srgbClr val="6E6F73"/>
+                        </a:solidFill>
+                        <a:latin typeface="Lato"/>
+                      </a:rPr>
+                      <a:t>$68.0B</a:t>
+                    </a:r>
+                  </a:p>
+                </c:rich>
+              </c:tx>
+              <c:dLblPos val="outEnd"/>
+              <c:showLegendKey val="0"/>
+              <c:showVal val="1"/>
+              <c:showCatName val="0"/>
+              <c:showSerName val="0"/>
+              <c:showPercent val="0"/>
+              <c:showBubbleSize val="0"/>
+            </c:dLbl>
+            <c:dLbl>
+              <c:idx val="5"/>
+              <c:tx>
+                <c:rich>
+                  <a:bodyPr/>
+                  <a:lstStyle/>
+                  <a:p>
+                    <a:r>
+                      <a:rPr sz="1400" b="1">
+                        <a:solidFill>
+                          <a:srgbClr val="1E2028"/>
+                        </a:solidFill>
+                        <a:latin typeface="Lato"/>
+                      </a:rPr>
                       <a:t>27.0%</a:t>
                     </a:r>
                   </a:p>
@@ -443,7 +494,7 @@
               <c:showBubbleSize val="0"/>
             </c:dLbl>
             <c:dLbl>
-              <c:idx val="5"/>
+              <c:idx val="6"/>
               <c:tx>
                 <c:rich>
                   <a:bodyPr/>
@@ -481,7 +532,7 @@
               <c:showBubbleSize val="0"/>
             </c:dLbl>
             <c:dLbl>
-              <c:idx val="6"/>
+              <c:idx val="7"/>
               <c:tx>
                 <c:rich>
                   <a:bodyPr/>
@@ -519,7 +570,7 @@
               <c:showBubbleSize val="0"/>
             </c:dLbl>
             <c:dLbl>
-              <c:idx val="7"/>
+              <c:idx val="8"/>
               <c:tx>
                 <c:rich>
                   <a:bodyPr/>
@@ -557,7 +608,7 @@
               <c:showBubbleSize val="0"/>
             </c:dLbl>
             <c:dLbl>
-              <c:idx val="8"/>
+              <c:idx val="9"/>
               <c:tx>
                 <c:rich>
                   <a:bodyPr/>
@@ -604,9 +655,9 @@
           </c:dLbls>
           <c:cat>
             <c:strRef>
-              <c:f>Sheet1!$A$2:$A$10</c:f>
+              <c:f>Sheet1!$A$2:$A$11</c:f>
               <c:strCache>
-                <c:ptCount val="9"/>
+                <c:ptCount val="10"/>
                 <c:pt idx="0">
                   <c:v>UNC
 (#27)</c:v>
@@ -624,22 +675,26 @@
 (#7)</c:v>
                 </c:pt>
                 <c:pt idx="4">
+                  <c:v>Harvard
+(#3)</c:v>
+                </c:pt>
+                <c:pt idx="5">
                   <c:v>UVA
 (#26)</c:v>
                 </c:pt>
-                <c:pt idx="5">
+                <c:pt idx="6">
                   <c:v>Brown
 (#16)</c:v>
                 </c:pt>
-                <c:pt idx="6">
+                <c:pt idx="7">
                   <c:v>Ohio State
 (#44)</c:v>
                 </c:pt>
-                <c:pt idx="7">
+                <c:pt idx="8">
                   <c:v>Northeastern
 (#42)</c:v>
                 </c:pt>
-                <c:pt idx="8">
+                <c:pt idx="9">
                   <c:v>MIT
 (#1)</c:v>
                 </c:pt>
@@ -648,10 +703,10 @@
           </c:cat>
           <c:val>
             <c:numRef>
-              <c:f>Sheet1!$B$2:$B$10</c:f>
+              <c:f>Sheet1!$B$2:$B$11</c:f>
               <c:numCache>
                 <c:formatCode>General</c:formatCode>
-                <c:ptCount val="9"/>
+                <c:ptCount val="10"/>
                 <c:pt idx="0">
                   <c:v>37.8</c:v>
                 </c:pt>
@@ -665,18 +720,21 @@
                   <c:v>27.4</c:v>
                 </c:pt>
                 <c:pt idx="4">
+                  <c:v>27.1</c:v>
+                </c:pt>
+                <c:pt idx="5">
                   <c:v>27</c:v>
                 </c:pt>
-                <c:pt idx="5">
+                <c:pt idx="6">
                   <c:v>19.6</c:v>
                 </c:pt>
-                <c:pt idx="6">
+                <c:pt idx="7">
                   <c:v>16.03</c:v>
                 </c:pt>
-                <c:pt idx="7">
+                <c:pt idx="8">
                   <c:v>16</c:v>
                 </c:pt>
-                <c:pt idx="8">
+                <c:pt idx="9">
                   <c:v>10.3</c:v>
                 </c:pt>
               </c:numCache>
@@ -792,7 +850,7 @@
             <c:idx val="7"/>
             <c:spPr>
               <a:solidFill>
-                <a:srgbClr val="C8102E"/>
+                <a:srgbClr val="D6D7D9"/>
               </a:solidFill>
               <a:ln w="6350">
                 <a:solidFill>
@@ -805,6 +863,19 @@
             <c:idx val="8"/>
             <c:spPr>
               <a:solidFill>
+                <a:srgbClr val="C8102E"/>
+              </a:solidFill>
+              <a:ln w="6350">
+                <a:solidFill>
+                  <a:srgbClr val="8A8B8E"/>
+                </a:solidFill>
+              </a:ln>
+            </c:spPr>
+          </c:dPt>
+          <c:dPt>
+            <c:idx val="9"/>
+            <c:spPr>
+              <a:solidFill>
                 <a:srgbClr val="D6D7D9"/>
               </a:solidFill>
               <a:ln w="6350">
@@ -816,9 +887,9 @@
           </c:dPt>
           <c:cat>
             <c:strRef>
-              <c:f>Sheet1!$A$2:$A$10</c:f>
+              <c:f>Sheet1!$A$2:$A$11</c:f>
               <c:strCache>
-                <c:ptCount val="9"/>
+                <c:ptCount val="10"/>
                 <c:pt idx="0">
                   <c:v>UNC
 (#27)</c:v>
@@ -836,22 +907,26 @@
 (#7)</c:v>
                 </c:pt>
                 <c:pt idx="4">
+                  <c:v>Harvard
+(#3)</c:v>
+                </c:pt>
+                <c:pt idx="5">
                   <c:v>UVA
 (#26)</c:v>
                 </c:pt>
-                <c:pt idx="5">
+                <c:pt idx="6">
                   <c:v>Brown
 (#16)</c:v>
                 </c:pt>
-                <c:pt idx="6">
+                <c:pt idx="7">
                   <c:v>Ohio State
 (#44)</c:v>
                 </c:pt>
-                <c:pt idx="7">
+                <c:pt idx="8">
                   <c:v>Northeastern
 (#42)</c:v>
                 </c:pt>
-                <c:pt idx="8">
+                <c:pt idx="9">
                   <c:v>MIT
 (#1)</c:v>
                 </c:pt>
@@ -860,10 +935,10 @@
           </c:cat>
           <c:val>
             <c:numRef>
-              <c:f>Sheet1!$C$2:$C$10</c:f>
+              <c:f>Sheet1!$C$2:$C$11</c:f>
               <c:numCache>
                 <c:formatCode>General</c:formatCode>
-                <c:ptCount val="9"/>
+                <c:ptCount val="10"/>
                 <c:pt idx="0">
                   <c:v>18.9</c:v>
                 </c:pt>
@@ -877,18 +952,21 @@
                   <c:v>27.4</c:v>
                 </c:pt>
                 <c:pt idx="4">
+                  <c:v>27.1</c:v>
+                </c:pt>
+                <c:pt idx="5">
                   <c:v>27</c:v>
                 </c:pt>
-                <c:pt idx="5">
+                <c:pt idx="6">
                   <c:v>19.6</c:v>
                 </c:pt>
-                <c:pt idx="6">
+                <c:pt idx="7">
                   <c:v>16.03</c:v>
                 </c:pt>
-                <c:pt idx="7">
+                <c:pt idx="8">
                   <c:v>16</c:v>
                 </c:pt>
-                <c:pt idx="8">
+                <c:pt idx="9">
                   <c:v>10.3</c:v>
                 </c:pt>
               </c:numCache>
@@ -5052,7 +5130,7 @@
                 </a:solidFill>
                 <a:latin typeface="Lato"/>
               </a:rPr>
-              <a:t>As officially reported (updated 2026-10-09) — 9 of 51 institutions had released this figure. Gold portion of a bar is the estimated share of the return attributable to legacy SpaceX venture stakes crystallized by SpaceX's 2026 IPO.</a:t>
+              <a:t>As officially reported (updated 2026-10-16) — 10 of 51 institutions had released this figure. Gold portion of a bar is the estimated share of the return attributable to legacy SpaceX venture stakes crystallized by SpaceX's 2026 IPO.</a:t>
             </a:r>
           </a:p>
         </p:txBody>
@@ -5348,7 +5426,7 @@
                 </a:solidFill>
                 <a:latin typeface="Lato"/>
               </a:rPr>
-              <a:t>Source: institution financial reports, board/trustee disclosures, and financial press coverage. US News rank in parentheses (2027 Best National Universities (released Sept 22, 2026); ties included). Dollar figure under each return is the reported FY26 endowment value; NA = not yet published. Northeastern's return is a management estimate pending audited figures. SpaceX-attributable shares reflect each institution's own disclosure; not an audited breakdown. Remaining 42 of 51 institutions had not yet released this figure as of 2026-10-09.</a:t>
+              <a:t>Source: institution financial reports, board/trustee disclosures, and financial press coverage. US News rank in parentheses (2027 Best National Universities (released Sept 22, 2026); ties included). Dollar figure under each return is the reported FY26 endowment value; NA = not yet published. Northeastern's return is a management estimate pending audited figures. SpaceX-attributable shares reflect each institution's own disclosure; not an audited breakdown. Remaining 41 of 51 institutions had not yet released this figure as of 2026-10-16.</a:t>
             </a:r>
           </a:p>
         </p:txBody>
@@ -5506,7 +5584,7 @@
                 </a:solidFill>
                 <a:latin typeface="Lato"/>
               </a:rPr>
-              <a:t>As officially reported (updated 2026-10-09) — 4 of 51 institutions had released this metric.</a:t>
+              <a:t>As officially reported (updated 2026-10-16) — 4 of 51 institutions had released this metric.</a:t>
             </a:r>
           </a:p>
         </p:txBody>
@@ -5721,7 +5799,7 @@
                 </a:solidFill>
                 <a:latin typeface="Lato"/>
               </a:rPr>
-              <a:t>Source: institution financial reports, board/trustee disclosures, and financial press coverage. US News rank in parentheses (2027 Best National Universities (released Sept 22, 2026); ties included). Remaining 47 of 51 institutions had not yet released this figure as of 2026-10-09.</a:t>
+              <a:t>Source: institution financial reports, board/trustee disclosures, and financial press coverage. US News rank in parentheses (2027 Best National Universities (released Sept 22, 2026); ties included). Remaining 47 of 51 institutions had not yet released this figure as of 2026-10-16.</a:t>
             </a:r>
           </a:p>
         </p:txBody>
@@ -5879,7 +5957,7 @@
                 </a:solidFill>
                 <a:latin typeface="Lato"/>
               </a:rPr>
-              <a:t>As officially reported (updated 2026-10-09) — 5 of 51 institutions had released this metric.</a:t>
+              <a:t>As officially reported (updated 2026-10-16) — 5 of 51 institutions had released this metric.</a:t>
             </a:r>
           </a:p>
         </p:txBody>
@@ -6094,7 +6172,7 @@
                 </a:solidFill>
                 <a:latin typeface="Lato"/>
               </a:rPr>
-              <a:t>Source: institution financial reports, board/trustee disclosures, and financial press coverage. US News rank in parentheses (2027 Best National Universities (released Sept 22, 2026); ties included). Remaining 46 of 51 institutions had not yet released this figure as of 2026-10-09.</a:t>
+              <a:t>Source: institution financial reports, board/trustee disclosures, and financial press coverage. US News rank in parentheses (2027 Best National Universities (released Sept 22, 2026); ties included). Remaining 46 of 51 institutions had not yet released this figure as of 2026-10-16.</a:t>
             </a:r>
           </a:p>
         </p:txBody>

--- a/endowment/output/FY26_Endowment_Returns_Top50.pptx
+++ b/endowment/output/FY26_Endowment_Returns_Top50.pptx
@@ -242,7 +242,7 @@
             <c:idx val="8"/>
             <c:spPr>
               <a:solidFill>
-                <a:srgbClr val="C8102E"/>
+                <a:srgbClr val="D6D7D9"/>
               </a:solidFill>
               <a:ln w="6350">
                 <a:solidFill>
@@ -253,6 +253,19 @@
           </c:dPt>
           <c:dPt>
             <c:idx val="9"/>
+            <c:spPr>
+              <a:solidFill>
+                <a:srgbClr val="C8102E"/>
+              </a:solidFill>
+              <a:ln w="6350">
+                <a:solidFill>
+                  <a:srgbClr val="8A8B8E"/>
+                </a:solidFill>
+              </a:ln>
+            </c:spPr>
+          </c:dPt>
+          <c:dPt>
+            <c:idx val="10"/>
             <c:spPr>
               <a:solidFill>
                 <a:srgbClr val="D6D7D9"/>
@@ -273,7 +286,7 @@
                   <a:lstStyle/>
                   <a:p>
                     <a:r>
-                      <a:rPr sz="1400" b="1">
+                      <a:rPr sz="1100" b="1">
                         <a:solidFill>
                           <a:srgbClr val="1E2028"/>
                         </a:solidFill>
@@ -284,7 +297,7 @@
                   </a:p>
                   <a:p>
                     <a:r>
-                      <a:rPr sz="1100">
+                      <a:rPr sz="800">
                         <a:solidFill>
                           <a:srgbClr val="6E6F73"/>
                         </a:solidFill>
@@ -311,7 +324,7 @@
                   <a:lstStyle/>
                   <a:p>
                     <a:r>
-                      <a:rPr sz="1400" b="1">
+                      <a:rPr sz="1100" b="1">
                         <a:solidFill>
                           <a:srgbClr val="1E2028"/>
                         </a:solidFill>
@@ -322,7 +335,7 @@
                   </a:p>
                   <a:p>
                     <a:r>
-                      <a:rPr sz="1100">
+                      <a:rPr sz="800">
                         <a:solidFill>
                           <a:srgbClr val="6E6F73"/>
                         </a:solidFill>
@@ -349,7 +362,7 @@
                   <a:lstStyle/>
                   <a:p>
                     <a:r>
-                      <a:rPr sz="1400" b="1">
+                      <a:rPr sz="1100" b="1">
                         <a:solidFill>
                           <a:srgbClr val="1E2028"/>
                         </a:solidFill>
@@ -360,7 +373,7 @@
                   </a:p>
                   <a:p>
                     <a:r>
-                      <a:rPr sz="1100">
+                      <a:rPr sz="800">
                         <a:solidFill>
                           <a:srgbClr val="6E6F73"/>
                         </a:solidFill>
@@ -387,7 +400,7 @@
                   <a:lstStyle/>
                   <a:p>
                     <a:r>
-                      <a:rPr sz="1400" b="1">
+                      <a:rPr sz="1100" b="1">
                         <a:solidFill>
                           <a:srgbClr val="1E2028"/>
                         </a:solidFill>
@@ -398,7 +411,7 @@
                   </a:p>
                   <a:p>
                     <a:r>
-                      <a:rPr sz="1100">
+                      <a:rPr sz="800">
                         <a:solidFill>
                           <a:srgbClr val="6E6F73"/>
                         </a:solidFill>
@@ -425,7 +438,7 @@
                   <a:lstStyle/>
                   <a:p>
                     <a:r>
-                      <a:rPr sz="1400" b="1">
+                      <a:rPr sz="1100" b="1">
                         <a:solidFill>
                           <a:srgbClr val="1E2028"/>
                         </a:solidFill>
@@ -436,7 +449,7 @@
                   </a:p>
                   <a:p>
                     <a:r>
-                      <a:rPr sz="1100">
+                      <a:rPr sz="800">
                         <a:solidFill>
                           <a:srgbClr val="6E6F73"/>
                         </a:solidFill>
@@ -463,7 +476,7 @@
                   <a:lstStyle/>
                   <a:p>
                     <a:r>
-                      <a:rPr sz="1400" b="1">
+                      <a:rPr sz="1100" b="1">
                         <a:solidFill>
                           <a:srgbClr val="1E2028"/>
                         </a:solidFill>
@@ -474,7 +487,7 @@
                   </a:p>
                   <a:p>
                     <a:r>
-                      <a:rPr sz="1100">
+                      <a:rPr sz="800">
                         <a:solidFill>
                           <a:srgbClr val="6E6F73"/>
                         </a:solidFill>
@@ -501,24 +514,24 @@
                   <a:lstStyle/>
                   <a:p>
                     <a:r>
-                      <a:rPr sz="1400" b="1">
+                      <a:rPr sz="1100" b="1">
                         <a:solidFill>
                           <a:srgbClr val="1E2028"/>
                         </a:solidFill>
                         <a:latin typeface="Lato"/>
                       </a:rPr>
-                      <a:t>19.6%</a:t>
+                      <a:t>23.7%</a:t>
                     </a:r>
                   </a:p>
                   <a:p>
                     <a:r>
-                      <a:rPr sz="1100">
+                      <a:rPr sz="800">
                         <a:solidFill>
                           <a:srgbClr val="6E6F73"/>
                         </a:solidFill>
                         <a:latin typeface="Lato"/>
                       </a:rPr>
-                      <a:t>$9.5B</a:t>
+                      <a:t>$42.3B</a:t>
                     </a:r>
                   </a:p>
                 </c:rich>
@@ -539,24 +552,24 @@
                   <a:lstStyle/>
                   <a:p>
                     <a:r>
-                      <a:rPr sz="1400" b="1">
+                      <a:rPr sz="1100" b="1">
                         <a:solidFill>
                           <a:srgbClr val="1E2028"/>
                         </a:solidFill>
                         <a:latin typeface="Lato"/>
                       </a:rPr>
-                      <a:t>16.0%</a:t>
+                      <a:t>19.6%</a:t>
                     </a:r>
                   </a:p>
                   <a:p>
                     <a:r>
-                      <a:rPr sz="1100">
+                      <a:rPr sz="800">
                         <a:solidFill>
                           <a:srgbClr val="6E6F73"/>
                         </a:solidFill>
                         <a:latin typeface="Lato"/>
                       </a:rPr>
-                      <a:t>$9.7B</a:t>
+                      <a:t>$9.5B</a:t>
                     </a:r>
                   </a:p>
                 </c:rich>
@@ -577,9 +590,9 @@
                   <a:lstStyle/>
                   <a:p>
                     <a:r>
-                      <a:rPr sz="1400" b="1">
+                      <a:rPr sz="1100" b="1">
                         <a:solidFill>
-                          <a:srgbClr val="C8102E"/>
+                          <a:srgbClr val="1E2028"/>
                         </a:solidFill>
                         <a:latin typeface="Lato"/>
                       </a:rPr>
@@ -588,13 +601,13 @@
                   </a:p>
                   <a:p>
                     <a:r>
-                      <a:rPr sz="1100">
+                      <a:rPr sz="800">
                         <a:solidFill>
                           <a:srgbClr val="6E6F73"/>
                         </a:solidFill>
                         <a:latin typeface="Lato"/>
                       </a:rPr>
-                      <a:t>NA</a:t>
+                      <a:t>$9.7B</a:t>
                     </a:r>
                   </a:p>
                 </c:rich>
@@ -615,7 +628,45 @@
                   <a:lstStyle/>
                   <a:p>
                     <a:r>
-                      <a:rPr sz="1400" b="1">
+                      <a:rPr sz="1100" b="1">
+                        <a:solidFill>
+                          <a:srgbClr val="C8102E"/>
+                        </a:solidFill>
+                        <a:latin typeface="Lato"/>
+                      </a:rPr>
+                      <a:t>16.0%</a:t>
+                    </a:r>
+                  </a:p>
+                  <a:p>
+                    <a:r>
+                      <a:rPr sz="800">
+                        <a:solidFill>
+                          <a:srgbClr val="6E6F73"/>
+                        </a:solidFill>
+                        <a:latin typeface="Lato"/>
+                      </a:rPr>
+                      <a:t>NA</a:t>
+                    </a:r>
+                  </a:p>
+                </c:rich>
+              </c:tx>
+              <c:dLblPos val="outEnd"/>
+              <c:showLegendKey val="0"/>
+              <c:showVal val="1"/>
+              <c:showCatName val="0"/>
+              <c:showSerName val="0"/>
+              <c:showPercent val="0"/>
+              <c:showBubbleSize val="0"/>
+            </c:dLbl>
+            <c:dLbl>
+              <c:idx val="10"/>
+              <c:tx>
+                <c:rich>
+                  <a:bodyPr/>
+                  <a:lstStyle/>
+                  <a:p>
+                    <a:r>
+                      <a:rPr sz="1100" b="1">
                         <a:solidFill>
                           <a:srgbClr val="1E2028"/>
                         </a:solidFill>
@@ -626,7 +677,7 @@
                   </a:p>
                   <a:p>
                     <a:r>
-                      <a:rPr sz="1100">
+                      <a:rPr sz="800">
                         <a:solidFill>
                           <a:srgbClr val="6E6F73"/>
                         </a:solidFill>
@@ -655,9 +706,9 @@
           </c:dLbls>
           <c:cat>
             <c:strRef>
-              <c:f>Sheet1!$A$2:$A$11</c:f>
+              <c:f>Sheet1!$A$2:$A$12</c:f>
               <c:strCache>
-                <c:ptCount val="10"/>
+                <c:ptCount val="11"/>
                 <c:pt idx="0">
                   <c:v>UNC
 (#27)</c:v>
@@ -683,18 +734,22 @@
 (#26)</c:v>
                 </c:pt>
                 <c:pt idx="6">
+                  <c:v>Princeton
+(#2)</c:v>
+                </c:pt>
+                <c:pt idx="7">
                   <c:v>Brown
 (#16)</c:v>
                 </c:pt>
-                <c:pt idx="7">
+                <c:pt idx="8">
                   <c:v>Ohio State
 (#44)</c:v>
                 </c:pt>
-                <c:pt idx="8">
+                <c:pt idx="9">
                   <c:v>Northeastern
 (#42)</c:v>
                 </c:pt>
-                <c:pt idx="9">
+                <c:pt idx="10">
                   <c:v>MIT
 (#1)</c:v>
                 </c:pt>
@@ -703,10 +758,10 @@
           </c:cat>
           <c:val>
             <c:numRef>
-              <c:f>Sheet1!$B$2:$B$11</c:f>
+              <c:f>Sheet1!$B$2:$B$12</c:f>
               <c:numCache>
                 <c:formatCode>General</c:formatCode>
-                <c:ptCount val="10"/>
+                <c:ptCount val="11"/>
                 <c:pt idx="0">
                   <c:v>37.8</c:v>
                 </c:pt>
@@ -726,15 +781,18 @@
                   <c:v>27</c:v>
                 </c:pt>
                 <c:pt idx="6">
+                  <c:v>23.7</c:v>
+                </c:pt>
+                <c:pt idx="7">
                   <c:v>19.6</c:v>
                 </c:pt>
-                <c:pt idx="7">
+                <c:pt idx="8">
                   <c:v>16.03</c:v>
                 </c:pt>
-                <c:pt idx="8">
+                <c:pt idx="9">
                   <c:v>16</c:v>
                 </c:pt>
-                <c:pt idx="9">
+                <c:pt idx="10">
                   <c:v>10.3</c:v>
                 </c:pt>
               </c:numCache>
@@ -863,7 +921,7 @@
             <c:idx val="8"/>
             <c:spPr>
               <a:solidFill>
-                <a:srgbClr val="C8102E"/>
+                <a:srgbClr val="D6D7D9"/>
               </a:solidFill>
               <a:ln w="6350">
                 <a:solidFill>
@@ -876,6 +934,19 @@
             <c:idx val="9"/>
             <c:spPr>
               <a:solidFill>
+                <a:srgbClr val="C8102E"/>
+              </a:solidFill>
+              <a:ln w="6350">
+                <a:solidFill>
+                  <a:srgbClr val="8A8B8E"/>
+                </a:solidFill>
+              </a:ln>
+            </c:spPr>
+          </c:dPt>
+          <c:dPt>
+            <c:idx val="10"/>
+            <c:spPr>
+              <a:solidFill>
                 <a:srgbClr val="D6D7D9"/>
               </a:solidFill>
               <a:ln w="6350">
@@ -887,9 +958,9 @@
           </c:dPt>
           <c:cat>
             <c:strRef>
-              <c:f>Sheet1!$A$2:$A$11</c:f>
+              <c:f>Sheet1!$A$2:$A$12</c:f>
               <c:strCache>
-                <c:ptCount val="10"/>
+                <c:ptCount val="11"/>
                 <c:pt idx="0">
                   <c:v>UNC
 (#27)</c:v>
@@ -915,18 +986,22 @@
 (#26)</c:v>
                 </c:pt>
                 <c:pt idx="6">
+                  <c:v>Princeton
+(#2)</c:v>
+                </c:pt>
+                <c:pt idx="7">
                   <c:v>Brown
 (#16)</c:v>
                 </c:pt>
-                <c:pt idx="7">
+                <c:pt idx="8">
                   <c:v>Ohio State
 (#44)</c:v>
                 </c:pt>
-                <c:pt idx="8">
+                <c:pt idx="9">
                   <c:v>Northeastern
 (#42)</c:v>
                 </c:pt>
-                <c:pt idx="9">
+                <c:pt idx="10">
                   <c:v>MIT
 (#1)</c:v>
                 </c:pt>
@@ -935,10 +1010,10 @@
           </c:cat>
           <c:val>
             <c:numRef>
-              <c:f>Sheet1!$C$2:$C$11</c:f>
+              <c:f>Sheet1!$C$2:$C$12</c:f>
               <c:numCache>
                 <c:formatCode>General</c:formatCode>
-                <c:ptCount val="10"/>
+                <c:ptCount val="11"/>
                 <c:pt idx="0">
                   <c:v>18.9</c:v>
                 </c:pt>
@@ -958,15 +1033,18 @@
                   <c:v>27</c:v>
                 </c:pt>
                 <c:pt idx="6">
+                  <c:v>23.7</c:v>
+                </c:pt>
+                <c:pt idx="7">
                   <c:v>19.6</c:v>
                 </c:pt>
-                <c:pt idx="7">
+                <c:pt idx="8">
                   <c:v>16.03</c:v>
                 </c:pt>
-                <c:pt idx="8">
+                <c:pt idx="9">
                   <c:v>16</c:v>
                 </c:pt>
-                <c:pt idx="9">
+                <c:pt idx="10">
                   <c:v>10.3</c:v>
                 </c:pt>
               </c:numCache>
@@ -1000,7 +1078,7 @@
           <a:lstStyle/>
           <a:p>
             <a:pPr>
-              <a:defRPr sz="1200"/>
+              <a:defRPr sz="1000"/>
             </a:pPr>
           </a:p>
         </c:txPr>
@@ -1060,7 +1138,7 @@
     <a:lstStyle/>
     <a:p>
       <a:pPr>
-        <a:defRPr sz="1200">
+        <a:defRPr sz="1000">
           <a:solidFill>
             <a:srgbClr val="1E2028"/>
           </a:solidFill>
@@ -5130,7 +5208,7 @@
                 </a:solidFill>
                 <a:latin typeface="Lato"/>
               </a:rPr>
-              <a:t>As officially reported (updated 2026-10-16) — 10 of 51 institutions had released this figure. Gold portion of a bar is the estimated share of the return attributable to legacy SpaceX venture stakes crystallized by SpaceX's 2026 IPO.</a:t>
+              <a:t>As officially reported (updated 2026-10-23) — 11 of 51 institutions had released this figure. Gold portion of a bar is the estimated share of the return attributable to legacy SpaceX venture stakes crystallized by SpaceX's 2026 IPO.</a:t>
             </a:r>
           </a:p>
         </p:txBody>
@@ -5426,7 +5504,7 @@
                 </a:solidFill>
                 <a:latin typeface="Lato"/>
               </a:rPr>
-              <a:t>Source: institution financial reports, board/trustee disclosures, and financial press coverage. US News rank in parentheses (2027 Best National Universities (released Sept 22, 2026); ties included). Dollar figure under each return is the reported FY26 endowment value; NA = not yet published. Northeastern's return is a management estimate pending audited figures. SpaceX-attributable shares reflect each institution's own disclosure; not an audited breakdown. Remaining 41 of 51 institutions had not yet released this figure as of 2026-10-16.</a:t>
+              <a:t>Source: institution financial reports, board/trustee disclosures, and financial press coverage. US News rank in parentheses (2027 Best National Universities (released Sept 22, 2026); ties included). Dollar figure under each return is the reported FY26 endowment value; NA = not yet published. Northeastern's return is a management estimate pending audited figures. SpaceX-attributable shares reflect each institution's own disclosure; not an audited breakdown. Remaining 40 of 51 institutions had not yet released this figure as of 2026-10-23.</a:t>
             </a:r>
           </a:p>
         </p:txBody>
@@ -5584,7 +5662,7 @@
                 </a:solidFill>
                 <a:latin typeface="Lato"/>
               </a:rPr>
-              <a:t>As officially reported (updated 2026-10-16) — 4 of 51 institutions had released this metric.</a:t>
+              <a:t>As officially reported (updated 2026-10-23) — 4 of 51 institutions had released this metric.</a:t>
             </a:r>
           </a:p>
         </p:txBody>
@@ -5799,7 +5877,7 @@
                 </a:solidFill>
                 <a:latin typeface="Lato"/>
               </a:rPr>
-              <a:t>Source: institution financial reports, board/trustee disclosures, and financial press coverage. US News rank in parentheses (2027 Best National Universities (released Sept 22, 2026); ties included). Remaining 47 of 51 institutions had not yet released this figure as of 2026-10-16.</a:t>
+              <a:t>Source: institution financial reports, board/trustee disclosures, and financial press coverage. US News rank in parentheses (2027 Best National Universities (released Sept 22, 2026); ties included). Remaining 47 of 51 institutions had not yet released this figure as of 2026-10-23.</a:t>
             </a:r>
           </a:p>
         </p:txBody>
@@ -5957,7 +6035,7 @@
                 </a:solidFill>
                 <a:latin typeface="Lato"/>
               </a:rPr>
-              <a:t>As officially reported (updated 2026-10-16) — 5 of 51 institutions had released this metric.</a:t>
+              <a:t>As officially reported (updated 2026-10-23) — 5 of 51 institutions had released this metric.</a:t>
             </a:r>
           </a:p>
         </p:txBody>
@@ -6172,7 +6250,7 @@
                 </a:solidFill>
                 <a:latin typeface="Lato"/>
               </a:rPr>
-              <a:t>Source: institution financial reports, board/trustee disclosures, and financial press coverage. US News rank in parentheses (2027 Best National Universities (released Sept 22, 2026); ties included). Remaining 46 of 51 institutions had not yet released this figure as of 2026-10-16.</a:t>
+              <a:t>Source: institution financial reports, board/trustee disclosures, and financial press coverage. US News rank in parentheses (2027 Best National Universities (released Sept 22, 2026); ties included). Remaining 46 of 51 institutions had not yet released this figure as of 2026-10-23.</a:t>
             </a:r>
           </a:p>
         </p:txBody>
